--- a/1차 프로젝트/1. 기획서_V2.pptx
+++ b/1차 프로젝트/1. 기획서_V2.pptx
@@ -6,13 +6,12 @@
   </p:sldMasterIdLst>
   <p:sldIdLst>
     <p:sldId id="256" r:id="rId2"/>
-    <p:sldId id="257" r:id="rId3"/>
-    <p:sldId id="268" r:id="rId4"/>
-    <p:sldId id="266" r:id="rId5"/>
-    <p:sldId id="263" r:id="rId6"/>
-    <p:sldId id="260" r:id="rId7"/>
-    <p:sldId id="261" r:id="rId8"/>
-    <p:sldId id="267" r:id="rId9"/>
+    <p:sldId id="268" r:id="rId3"/>
+    <p:sldId id="266" r:id="rId4"/>
+    <p:sldId id="263" r:id="rId5"/>
+    <p:sldId id="260" r:id="rId6"/>
+    <p:sldId id="261" r:id="rId7"/>
+    <p:sldId id="267" r:id="rId8"/>
   </p:sldIdLst>
   <p:sldSz cx="12192000" cy="6858000"/>
   <p:notesSz cx="6858000" cy="9144000"/>
@@ -3182,84 +3181,6 @@
           <a:chExt cx="0" cy="0"/>
         </a:xfrm>
       </p:grpSpPr>
-      <p:sp>
-        <p:nvSpPr>
-          <p:cNvPr id="8" name="제목 1">
-            <a:extLst>
-              <a:ext uri="{FF2B5EF4-FFF2-40B4-BE49-F238E27FC236}">
-                <a16:creationId xmlns:a16="http://schemas.microsoft.com/office/drawing/2014/main" id="{2C2E5547-8B93-4929-A4AD-0D273BF17DC5}"/>
-              </a:ext>
-            </a:extLst>
-          </p:cNvPr>
-          <p:cNvSpPr txBox="1">
-            <a:spLocks/>
-          </p:cNvSpPr>
-          <p:nvPr/>
-        </p:nvSpPr>
-        <p:spPr>
-          <a:xfrm>
-            <a:off x="829985" y="431003"/>
-            <a:ext cx="3195730" cy="423303"/>
-          </a:xfrm>
-          <a:prstGeom prst="rect">
-            <a:avLst/>
-          </a:prstGeom>
-        </p:spPr>
-        <p:txBody>
-          <a:bodyPr vert="horz" lIns="91440" tIns="45720" rIns="91440" bIns="45720" rtlCol="0" anchor="ctr">
-            <a:normAutofit/>
-          </a:bodyPr>
-          <a:lstStyle>
-            <a:lvl1pPr algn="l" defTabSz="914400" rtl="0" eaLnBrk="1" latinLnBrk="1" hangingPunct="1">
-              <a:lnSpc>
-                <a:spcPct val="90000"/>
-              </a:lnSpc>
-              <a:spcBef>
-                <a:spcPct val="0"/>
-              </a:spcBef>
-              <a:buNone/>
-              <a:defRPr sz="4400" kern="1200">
-                <a:solidFill>
-                  <a:schemeClr val="tx1"/>
-                </a:solidFill>
-                <a:latin typeface="+mj-lt"/>
-                <a:ea typeface="+mj-ea"/>
-                <a:cs typeface="+mj-cs"/>
-              </a:defRPr>
-            </a:lvl1pPr>
-          </a:lstStyle>
-          <a:p>
-            <a:pPr>
-              <a:lnSpc>
-                <a:spcPct val="100000"/>
-              </a:lnSpc>
-            </a:pPr>
-            <a:r>
-              <a:rPr lang="en-US" altLang="ko-KR" sz="1800" spc="300" dirty="0">
-                <a:solidFill>
-                  <a:schemeClr val="tx1">
-                    <a:lumMod val="65000"/>
-                    <a:lumOff val="35000"/>
-                  </a:schemeClr>
-                </a:solidFill>
-                <a:latin typeface="a시월구일2" panose="02020600000000000000" pitchFamily="18" charset="-127"/>
-                <a:ea typeface="a시월구일2" panose="02020600000000000000" pitchFamily="18" charset="-127"/>
-              </a:rPr>
-              <a:t>PROJECT PROPOSAL</a:t>
-            </a:r>
-            <a:endParaRPr lang="ko-KR" altLang="en-US" sz="1800" spc="300" dirty="0">
-              <a:solidFill>
-                <a:schemeClr val="tx1">
-                  <a:lumMod val="65000"/>
-                  <a:lumOff val="35000"/>
-                </a:schemeClr>
-              </a:solidFill>
-              <a:latin typeface="a시월구일2" panose="02020600000000000000" pitchFamily="18" charset="-127"/>
-              <a:ea typeface="a시월구일2" panose="02020600000000000000" pitchFamily="18" charset="-127"/>
-            </a:endParaRPr>
-          </a:p>
-        </p:txBody>
-      </p:sp>
       <p:cxnSp>
         <p:nvCxnSpPr>
           <p:cNvPr id="6" name="직선 연결선 5">
@@ -3367,327 +3288,95 @@
           </a:p>
         </p:txBody>
       </p:sp>
-      <p:grpSp>
-        <p:nvGrpSpPr>
-          <p:cNvPr id="15" name="그룹 14">
+      <p:sp>
+        <p:nvSpPr>
+          <p:cNvPr id="14" name="제목 1">
             <a:extLst>
               <a:ext uri="{FF2B5EF4-FFF2-40B4-BE49-F238E27FC236}">
-                <a16:creationId xmlns:a16="http://schemas.microsoft.com/office/drawing/2014/main" id="{7ED67502-7674-4AEC-9490-BE720DDDB019}"/>
+                <a16:creationId xmlns:a16="http://schemas.microsoft.com/office/drawing/2014/main" id="{05BCAF62-D4BF-460D-8135-96EB901E9318}"/>
               </a:ext>
             </a:extLst>
           </p:cNvPr>
-          <p:cNvGrpSpPr/>
+          <p:cNvSpPr txBox="1">
+            <a:spLocks/>
+          </p:cNvSpPr>
           <p:nvPr/>
-        </p:nvGrpSpPr>
-        <p:grpSpPr>
+        </p:nvSpPr>
+        <p:spPr>
           <a:xfrm>
-            <a:off x="3596343" y="4498641"/>
-            <a:ext cx="5266015" cy="749584"/>
-            <a:chOff x="829985" y="4992503"/>
-            <a:chExt cx="5266015" cy="749584"/>
+            <a:off x="4763554" y="4834293"/>
+            <a:ext cx="3924300" cy="413931"/>
           </a:xfrm>
-        </p:grpSpPr>
-        <p:sp>
-          <p:nvSpPr>
-            <p:cNvPr id="10" name="제목 1">
-              <a:extLst>
-                <a:ext uri="{FF2B5EF4-FFF2-40B4-BE49-F238E27FC236}">
-                  <a16:creationId xmlns:a16="http://schemas.microsoft.com/office/drawing/2014/main" id="{5963AA9B-179B-4820-BEDE-45A0E81B1DD5}"/>
-                </a:ext>
-              </a:extLst>
-            </p:cNvPr>
-            <p:cNvSpPr txBox="1">
-              <a:spLocks/>
-            </p:cNvSpPr>
-            <p:nvPr/>
-          </p:nvSpPr>
-          <p:spPr>
-            <a:xfrm>
-              <a:off x="829985" y="4992503"/>
-              <a:ext cx="1341715" cy="413931"/>
-            </a:xfrm>
-            <a:prstGeom prst="rect">
-              <a:avLst/>
-            </a:prstGeom>
-          </p:spPr>
-          <p:txBody>
-            <a:bodyPr vert="horz" lIns="91440" tIns="45720" rIns="91440" bIns="45720" rtlCol="0" anchor="ctr">
-              <a:normAutofit/>
-            </a:bodyPr>
-            <a:lstStyle>
-              <a:lvl1pPr algn="l" defTabSz="914400" rtl="0" eaLnBrk="1" latinLnBrk="1" hangingPunct="1">
-                <a:lnSpc>
-                  <a:spcPct val="90000"/>
-                </a:lnSpc>
-                <a:spcBef>
-                  <a:spcPct val="0"/>
-                </a:spcBef>
-                <a:buNone/>
-                <a:defRPr sz="4400" kern="1200">
-                  <a:solidFill>
-                    <a:schemeClr val="tx1"/>
-                  </a:solidFill>
-                  <a:latin typeface="+mj-lt"/>
-                  <a:ea typeface="+mj-ea"/>
-                  <a:cs typeface="+mj-cs"/>
-                </a:defRPr>
-              </a:lvl1pPr>
-            </a:lstStyle>
-            <a:p>
-              <a:pPr marL="177800" indent="-177800">
-                <a:buFont typeface="Arial" panose="020B0604020202020204" pitchFamily="34" charset="0"/>
-                <a:buChar char="•"/>
-              </a:pPr>
-              <a:r>
-                <a:rPr lang="ko-KR" altLang="en-US" sz="1400" dirty="0">
-                  <a:latin typeface="a시월구일2" panose="02020600000000000000" pitchFamily="18" charset="-127"/>
-                  <a:ea typeface="a시월구일2" panose="02020600000000000000" pitchFamily="18" charset="-127"/>
-                </a:rPr>
-                <a:t>개발 기간</a:t>
-              </a:r>
-            </a:p>
-          </p:txBody>
-        </p:sp>
-        <p:sp>
-          <p:nvSpPr>
-            <p:cNvPr id="12" name="제목 1">
-              <a:extLst>
-                <a:ext uri="{FF2B5EF4-FFF2-40B4-BE49-F238E27FC236}">
-                  <a16:creationId xmlns:a16="http://schemas.microsoft.com/office/drawing/2014/main" id="{558FE02F-E547-4FCD-AD02-0B8DB31EDA64}"/>
-                </a:ext>
-              </a:extLst>
-            </p:cNvPr>
-            <p:cNvSpPr txBox="1">
-              <a:spLocks/>
-            </p:cNvSpPr>
-            <p:nvPr/>
-          </p:nvSpPr>
-          <p:spPr>
-            <a:xfrm>
-              <a:off x="829985" y="5328156"/>
-              <a:ext cx="1341715" cy="413931"/>
-            </a:xfrm>
-            <a:prstGeom prst="rect">
-              <a:avLst/>
-            </a:prstGeom>
-          </p:spPr>
-          <p:txBody>
-            <a:bodyPr vert="horz" lIns="91440" tIns="45720" rIns="91440" bIns="45720" rtlCol="0" anchor="ctr">
-              <a:normAutofit/>
-            </a:bodyPr>
-            <a:lstStyle>
-              <a:lvl1pPr algn="l" defTabSz="914400" rtl="0" eaLnBrk="1" latinLnBrk="1" hangingPunct="1">
-                <a:lnSpc>
-                  <a:spcPct val="90000"/>
-                </a:lnSpc>
-                <a:spcBef>
-                  <a:spcPct val="0"/>
-                </a:spcBef>
-                <a:buNone/>
-                <a:defRPr sz="4400" kern="1200">
-                  <a:solidFill>
-                    <a:schemeClr val="tx1"/>
-                  </a:solidFill>
-                  <a:latin typeface="+mj-lt"/>
-                  <a:ea typeface="+mj-ea"/>
-                  <a:cs typeface="+mj-cs"/>
-                </a:defRPr>
-              </a:lvl1pPr>
-            </a:lstStyle>
-            <a:p>
-              <a:pPr marL="177800" indent="-177800">
-                <a:buFont typeface="Arial" panose="020B0604020202020204" pitchFamily="34" charset="0"/>
-                <a:buChar char="•"/>
-              </a:pPr>
-              <a:r>
-                <a:rPr lang="ko-KR" altLang="en-US" sz="1400" dirty="0">
-                  <a:latin typeface="a시월구일2" panose="02020600000000000000" pitchFamily="18" charset="-127"/>
-                  <a:ea typeface="a시월구일2" panose="02020600000000000000" pitchFamily="18" charset="-127"/>
-                </a:rPr>
-                <a:t>제작</a:t>
-              </a:r>
-            </a:p>
-          </p:txBody>
-        </p:sp>
-        <p:sp>
-          <p:nvSpPr>
-            <p:cNvPr id="13" name="제목 1">
-              <a:extLst>
-                <a:ext uri="{FF2B5EF4-FFF2-40B4-BE49-F238E27FC236}">
-                  <a16:creationId xmlns:a16="http://schemas.microsoft.com/office/drawing/2014/main" id="{6DCD28C2-F01E-47E4-9A35-385BE5944A69}"/>
-                </a:ext>
-              </a:extLst>
-            </p:cNvPr>
-            <p:cNvSpPr txBox="1">
-              <a:spLocks/>
-            </p:cNvSpPr>
-            <p:nvPr/>
-          </p:nvSpPr>
-          <p:spPr>
-            <a:xfrm>
-              <a:off x="2171700" y="4992503"/>
-              <a:ext cx="3924300" cy="413931"/>
-            </a:xfrm>
-            <a:prstGeom prst="rect">
-              <a:avLst/>
-            </a:prstGeom>
-          </p:spPr>
-          <p:txBody>
-            <a:bodyPr vert="horz" lIns="91440" tIns="45720" rIns="91440" bIns="45720" rtlCol="0" anchor="ctr">
-              <a:normAutofit/>
-            </a:bodyPr>
-            <a:lstStyle>
-              <a:lvl1pPr algn="l" defTabSz="914400" rtl="0" eaLnBrk="1" latinLnBrk="1" hangingPunct="1">
-                <a:lnSpc>
-                  <a:spcPct val="90000"/>
-                </a:lnSpc>
-                <a:spcBef>
-                  <a:spcPct val="0"/>
-                </a:spcBef>
-                <a:buNone/>
-                <a:defRPr sz="4400" kern="1200">
-                  <a:solidFill>
-                    <a:schemeClr val="tx1"/>
-                  </a:solidFill>
-                  <a:latin typeface="+mj-lt"/>
-                  <a:ea typeface="+mj-ea"/>
-                  <a:cs typeface="+mj-cs"/>
-                </a:defRPr>
-              </a:lvl1pPr>
-            </a:lstStyle>
-            <a:p>
-              <a:r>
-                <a:rPr lang="en-US" altLang="ko-KR" sz="1400" dirty="0">
-                  <a:latin typeface="a시월구일1" panose="02020600000000000000" pitchFamily="18" charset="-127"/>
-                  <a:ea typeface="a시월구일1" panose="02020600000000000000" pitchFamily="18" charset="-127"/>
-                </a:rPr>
-                <a:t>2026.03.17 ~ 2026.04.17 (</a:t>
-              </a:r>
-              <a:r>
-                <a:rPr lang="ko-KR" altLang="en-US" sz="1400" dirty="0">
-                  <a:latin typeface="a시월구일1" panose="02020600000000000000" pitchFamily="18" charset="-127"/>
-                  <a:ea typeface="a시월구일1" panose="02020600000000000000" pitchFamily="18" charset="-127"/>
-                </a:rPr>
-                <a:t>약</a:t>
-              </a:r>
-              <a:r>
-                <a:rPr lang="en-US" altLang="ko-KR" sz="1400" dirty="0">
-                  <a:latin typeface="a시월구일1" panose="02020600000000000000" pitchFamily="18" charset="-127"/>
-                  <a:ea typeface="a시월구일1" panose="02020600000000000000" pitchFamily="18" charset="-127"/>
-                </a:rPr>
-                <a:t>1</a:t>
-              </a:r>
-              <a:r>
-                <a:rPr lang="ko-KR" altLang="en-US" sz="1400" dirty="0">
-                  <a:latin typeface="a시월구일1" panose="02020600000000000000" pitchFamily="18" charset="-127"/>
-                  <a:ea typeface="a시월구일1" panose="02020600000000000000" pitchFamily="18" charset="-127"/>
-                </a:rPr>
-                <a:t>개월</a:t>
-              </a:r>
-              <a:r>
-                <a:rPr lang="en-US" altLang="ko-KR" sz="1400" dirty="0">
-                  <a:latin typeface="a시월구일1" panose="02020600000000000000" pitchFamily="18" charset="-127"/>
-                  <a:ea typeface="a시월구일1" panose="02020600000000000000" pitchFamily="18" charset="-127"/>
-                </a:rPr>
-                <a:t>)</a:t>
-              </a:r>
-              <a:endParaRPr lang="ko-KR" altLang="en-US" sz="1400" dirty="0">
+          <a:prstGeom prst="rect">
+            <a:avLst/>
+          </a:prstGeom>
+        </p:spPr>
+        <p:txBody>
+          <a:bodyPr vert="horz" lIns="91440" tIns="45720" rIns="91440" bIns="45720" rtlCol="0" anchor="ctr">
+            <a:normAutofit/>
+          </a:bodyPr>
+          <a:lstStyle>
+            <a:lvl1pPr algn="l" defTabSz="914400" rtl="0" eaLnBrk="1" latinLnBrk="1" hangingPunct="1">
+              <a:lnSpc>
+                <a:spcPct val="90000"/>
+              </a:lnSpc>
+              <a:spcBef>
+                <a:spcPct val="0"/>
+              </a:spcBef>
+              <a:buNone/>
+              <a:defRPr sz="4400" kern="1200">
+                <a:solidFill>
+                  <a:schemeClr val="tx1"/>
+                </a:solidFill>
+                <a:latin typeface="+mj-lt"/>
+                <a:ea typeface="+mj-ea"/>
+                <a:cs typeface="+mj-cs"/>
+              </a:defRPr>
+            </a:lvl1pPr>
+          </a:lstStyle>
+          <a:p>
+            <a:r>
+              <a:rPr lang="ko-KR" altLang="en-US" sz="1400" dirty="0">
                 <a:latin typeface="a시월구일1" panose="02020600000000000000" pitchFamily="18" charset="-127"/>
                 <a:ea typeface="a시월구일1" panose="02020600000000000000" pitchFamily="18" charset="-127"/>
-              </a:endParaRPr>
-            </a:p>
-          </p:txBody>
-        </p:sp>
-        <p:sp>
-          <p:nvSpPr>
-            <p:cNvPr id="14" name="제목 1">
-              <a:extLst>
-                <a:ext uri="{FF2B5EF4-FFF2-40B4-BE49-F238E27FC236}">
-                  <a16:creationId xmlns:a16="http://schemas.microsoft.com/office/drawing/2014/main" id="{05BCAF62-D4BF-460D-8135-96EB901E9318}"/>
-                </a:ext>
-              </a:extLst>
-            </p:cNvPr>
-            <p:cNvSpPr txBox="1">
-              <a:spLocks/>
-            </p:cNvSpPr>
-            <p:nvPr/>
-          </p:nvSpPr>
-          <p:spPr>
-            <a:xfrm>
-              <a:off x="2171700" y="5328155"/>
-              <a:ext cx="3924300" cy="413931"/>
-            </a:xfrm>
-            <a:prstGeom prst="rect">
-              <a:avLst/>
-            </a:prstGeom>
-          </p:spPr>
-          <p:txBody>
-            <a:bodyPr vert="horz" lIns="91440" tIns="45720" rIns="91440" bIns="45720" rtlCol="0" anchor="ctr">
-              <a:normAutofit/>
-            </a:bodyPr>
-            <a:lstStyle>
-              <a:lvl1pPr algn="l" defTabSz="914400" rtl="0" eaLnBrk="1" latinLnBrk="1" hangingPunct="1">
-                <a:lnSpc>
-                  <a:spcPct val="90000"/>
-                </a:lnSpc>
-                <a:spcBef>
-                  <a:spcPct val="0"/>
-                </a:spcBef>
-                <a:buNone/>
-                <a:defRPr sz="4400" kern="1200">
-                  <a:solidFill>
-                    <a:schemeClr val="tx1"/>
-                  </a:solidFill>
-                  <a:latin typeface="+mj-lt"/>
-                  <a:ea typeface="+mj-ea"/>
-                  <a:cs typeface="+mj-cs"/>
-                </a:defRPr>
-              </a:lvl1pPr>
-            </a:lstStyle>
-            <a:p>
-              <a:r>
-                <a:rPr lang="ko-KR" altLang="en-US" sz="1400" dirty="0">
-                  <a:latin typeface="a시월구일1" panose="02020600000000000000" pitchFamily="18" charset="-127"/>
-                  <a:ea typeface="a시월구일1" panose="02020600000000000000" pitchFamily="18" charset="-127"/>
-                </a:rPr>
-                <a:t>생성형 </a:t>
-              </a:r>
-              <a:r>
-                <a:rPr lang="en-US" altLang="ko-KR" sz="1400" dirty="0">
-                  <a:latin typeface="a시월구일1" panose="02020600000000000000" pitchFamily="18" charset="-127"/>
-                  <a:ea typeface="a시월구일1" panose="02020600000000000000" pitchFamily="18" charset="-127"/>
-                </a:rPr>
-                <a:t>AI </a:t>
-              </a:r>
-              <a:r>
-                <a:rPr lang="ko-KR" altLang="en-US" sz="1400" dirty="0">
-                  <a:latin typeface="a시월구일1" panose="02020600000000000000" pitchFamily="18" charset="-127"/>
-                  <a:ea typeface="a시월구일1" panose="02020600000000000000" pitchFamily="18" charset="-127"/>
-                </a:rPr>
-                <a:t>개발자 양성과정 </a:t>
-              </a:r>
-              <a:r>
-                <a:rPr lang="en-US" altLang="ko-KR" sz="1400" dirty="0">
-                  <a:latin typeface="a시월구일1" panose="02020600000000000000" pitchFamily="18" charset="-127"/>
-                  <a:ea typeface="a시월구일1" panose="02020600000000000000" pitchFamily="18" charset="-127"/>
-                </a:rPr>
-                <a:t>| </a:t>
-              </a:r>
-              <a:r>
-                <a:rPr lang="ko-KR" altLang="en-US" sz="1400" dirty="0" err="1">
-                  <a:latin typeface="a시월구일1" panose="02020600000000000000" pitchFamily="18" charset="-127"/>
-                  <a:ea typeface="a시월구일1" panose="02020600000000000000" pitchFamily="18" charset="-127"/>
-                </a:rPr>
-                <a:t>진성욱</a:t>
-              </a:r>
-              <a:endParaRPr lang="ko-KR" altLang="en-US" sz="1400" dirty="0">
+              </a:rPr>
+              <a:t>생성형 </a:t>
+            </a:r>
+            <a:r>
+              <a:rPr lang="en-US" altLang="ko-KR" sz="1400" dirty="0">
                 <a:latin typeface="a시월구일1" panose="02020600000000000000" pitchFamily="18" charset="-127"/>
                 <a:ea typeface="a시월구일1" panose="02020600000000000000" pitchFamily="18" charset="-127"/>
-              </a:endParaRPr>
-            </a:p>
-          </p:txBody>
-        </p:sp>
-      </p:grpSp>
+              </a:rPr>
+              <a:t>AI </a:t>
+            </a:r>
+            <a:r>
+              <a:rPr lang="ko-KR" altLang="en-US" sz="1400" dirty="0">
+                <a:latin typeface="a시월구일1" panose="02020600000000000000" pitchFamily="18" charset="-127"/>
+                <a:ea typeface="a시월구일1" panose="02020600000000000000" pitchFamily="18" charset="-127"/>
+              </a:rPr>
+              <a:t>개발자 양성과정 </a:t>
+            </a:r>
+            <a:r>
+              <a:rPr lang="en-US" altLang="ko-KR" sz="1400" dirty="0">
+                <a:latin typeface="a시월구일1" panose="02020600000000000000" pitchFamily="18" charset="-127"/>
+                <a:ea typeface="a시월구일1" panose="02020600000000000000" pitchFamily="18" charset="-127"/>
+              </a:rPr>
+              <a:t>| </a:t>
+            </a:r>
+            <a:r>
+              <a:rPr lang="ko-KR" altLang="en-US" sz="1400" dirty="0" err="1">
+                <a:latin typeface="a시월구일1" panose="02020600000000000000" pitchFamily="18" charset="-127"/>
+                <a:ea typeface="a시월구일1" panose="02020600000000000000" pitchFamily="18" charset="-127"/>
+              </a:rPr>
+              <a:t>진성욱</a:t>
+            </a:r>
+            <a:endParaRPr lang="ko-KR" altLang="en-US" sz="1400" dirty="0">
+              <a:latin typeface="a시월구일1" panose="02020600000000000000" pitchFamily="18" charset="-127"/>
+              <a:ea typeface="a시월구일1" panose="02020600000000000000" pitchFamily="18" charset="-127"/>
+            </a:endParaRPr>
+          </a:p>
+        </p:txBody>
+      </p:sp>
       <p:sp>
         <p:nvSpPr>
           <p:cNvPr id="2" name="제목 1">
@@ -3764,2312 +3453,6 @@
 </file>
 
 <file path=ppt/slides/slide2.xml><?xml version="1.0" encoding="utf-8"?>
-<p:sld xmlns:a="http://schemas.openxmlformats.org/drawingml/2006/main" xmlns:r="http://schemas.openxmlformats.org/officeDocument/2006/relationships" xmlns:p="http://schemas.openxmlformats.org/presentationml/2006/main">
-  <p:cSld>
-    <p:spTree>
-      <p:nvGrpSpPr>
-        <p:cNvPr id="1" name="">
-          <a:extLst>
-            <a:ext uri="{FF2B5EF4-FFF2-40B4-BE49-F238E27FC236}">
-              <a16:creationId xmlns:a16="http://schemas.microsoft.com/office/drawing/2014/main" id="{D27FDF7E-2ABE-9DB9-5414-CDB14008C461}"/>
-            </a:ext>
-          </a:extLst>
-        </p:cNvPr>
-        <p:cNvGrpSpPr/>
-        <p:nvPr/>
-      </p:nvGrpSpPr>
-      <p:grpSpPr>
-        <a:xfrm>
-          <a:off x="0" y="0"/>
-          <a:ext cx="0" cy="0"/>
-          <a:chOff x="0" y="0"/>
-          <a:chExt cx="0" cy="0"/>
-        </a:xfrm>
-      </p:grpSpPr>
-      <p:sp>
-        <p:nvSpPr>
-          <p:cNvPr id="22" name="TextBox 21">
-            <a:extLst>
-              <a:ext uri="{FF2B5EF4-FFF2-40B4-BE49-F238E27FC236}">
-                <a16:creationId xmlns:a16="http://schemas.microsoft.com/office/drawing/2014/main" id="{01ADFB02-C265-4772-B225-91DA3691F715}"/>
-              </a:ext>
-            </a:extLst>
-          </p:cNvPr>
-          <p:cNvSpPr txBox="1"/>
-          <p:nvPr/>
-        </p:nvSpPr>
-        <p:spPr>
-          <a:xfrm>
-            <a:off x="544851" y="379988"/>
-            <a:ext cx="2224968" cy="489365"/>
-          </a:xfrm>
-          <a:prstGeom prst="rect">
-            <a:avLst/>
-          </a:prstGeom>
-          <a:noFill/>
-        </p:spPr>
-        <p:txBody>
-          <a:bodyPr wrap="none" lIns="0" tIns="0" rIns="0" bIns="0" rtlCol="0" anchor="t">
-            <a:spAutoFit/>
-          </a:bodyPr>
-          <a:lstStyle/>
-          <a:p>
-            <a:pPr>
-              <a:lnSpc>
-                <a:spcPct val="150000"/>
-              </a:lnSpc>
-            </a:pPr>
-            <a:r>
-              <a:rPr lang="en-US" altLang="ko-KR" sz="2400" dirty="0">
-                <a:latin typeface="a시월구일3" panose="02020600000000000000" pitchFamily="18" charset="-127"/>
-                <a:ea typeface="a시월구일3" panose="02020600000000000000" pitchFamily="18" charset="-127"/>
-                <a:cs typeface="+mj-cs"/>
-              </a:rPr>
-              <a:t>1. </a:t>
-            </a:r>
-            <a:r>
-              <a:rPr lang="ko-KR" altLang="en-US" sz="2400" dirty="0">
-                <a:latin typeface="a시월구일3" panose="02020600000000000000" pitchFamily="18" charset="-127"/>
-                <a:ea typeface="a시월구일3" panose="02020600000000000000" pitchFamily="18" charset="-127"/>
-                <a:cs typeface="+mj-cs"/>
-              </a:rPr>
-              <a:t>프로젝트 개요</a:t>
-            </a:r>
-            <a:endParaRPr lang="en-US" altLang="ko-KR" sz="2400" dirty="0">
-              <a:latin typeface="a시월구일3" panose="02020600000000000000" pitchFamily="18" charset="-127"/>
-              <a:ea typeface="a시월구일3" panose="02020600000000000000" pitchFamily="18" charset="-127"/>
-              <a:cs typeface="+mj-cs"/>
-            </a:endParaRPr>
-          </a:p>
-        </p:txBody>
-      </p:sp>
-      <p:sp>
-        <p:nvSpPr>
-          <p:cNvPr id="25" name="TextBox 24">
-            <a:extLst>
-              <a:ext uri="{FF2B5EF4-FFF2-40B4-BE49-F238E27FC236}">
-                <a16:creationId xmlns:a16="http://schemas.microsoft.com/office/drawing/2014/main" id="{3B2DEB8D-59AF-4E76-AEA1-B4474DD6AAC3}"/>
-              </a:ext>
-            </a:extLst>
-          </p:cNvPr>
-          <p:cNvSpPr txBox="1"/>
-          <p:nvPr/>
-        </p:nvSpPr>
-        <p:spPr>
-          <a:xfrm>
-            <a:off x="544851" y="889427"/>
-            <a:ext cx="5196935" cy="533223"/>
-          </a:xfrm>
-          <a:prstGeom prst="rect">
-            <a:avLst/>
-          </a:prstGeom>
-          <a:noFill/>
-        </p:spPr>
-        <p:txBody>
-          <a:bodyPr wrap="none" lIns="0" tIns="0" rIns="0" bIns="0" rtlCol="0" anchor="t">
-            <a:spAutoFit/>
-          </a:bodyPr>
-          <a:lstStyle/>
-          <a:p>
-            <a:pPr>
-              <a:lnSpc>
-                <a:spcPct val="130000"/>
-              </a:lnSpc>
-            </a:pPr>
-            <a:r>
-              <a:rPr lang="ko-KR" altLang="en-US" sz="1400" dirty="0">
-                <a:latin typeface="a시월구일1" panose="02020600000000000000" pitchFamily="18" charset="-127"/>
-                <a:ea typeface="a시월구일1" panose="02020600000000000000" pitchFamily="18" charset="-127"/>
-                <a:cs typeface="+mj-cs"/>
-              </a:rPr>
-              <a:t>환경과 건강 데이터를 결합하고 </a:t>
-            </a:r>
-            <a:r>
-              <a:rPr lang="ko-KR" altLang="en-US" sz="1400" b="1" dirty="0">
-                <a:latin typeface="a시월구일1" panose="02020600000000000000" pitchFamily="18" charset="-127"/>
-                <a:ea typeface="a시월구일1" panose="02020600000000000000" pitchFamily="18" charset="-127"/>
-                <a:cs typeface="+mj-cs"/>
-              </a:rPr>
-              <a:t>과거 데이터를 반영</a:t>
-            </a:r>
-            <a:r>
-              <a:rPr lang="ko-KR" altLang="en-US" sz="1400" dirty="0">
-                <a:latin typeface="a시월구일1" panose="02020600000000000000" pitchFamily="18" charset="-127"/>
-                <a:ea typeface="a시월구일1" panose="02020600000000000000" pitchFamily="18" charset="-127"/>
-                <a:cs typeface="+mj-cs"/>
-              </a:rPr>
-              <a:t>하여 </a:t>
-            </a:r>
-            <a:endParaRPr lang="en-US" altLang="ko-KR" sz="1400" dirty="0">
-              <a:latin typeface="a시월구일1" panose="02020600000000000000" pitchFamily="18" charset="-127"/>
-              <a:ea typeface="a시월구일1" panose="02020600000000000000" pitchFamily="18" charset="-127"/>
-              <a:cs typeface="+mj-cs"/>
-            </a:endParaRPr>
-          </a:p>
-          <a:p>
-            <a:pPr>
-              <a:lnSpc>
-                <a:spcPct val="130000"/>
-              </a:lnSpc>
-            </a:pPr>
-            <a:r>
-              <a:rPr lang="ko-KR" altLang="en-US" sz="1400" b="1" dirty="0">
-                <a:latin typeface="a시월구일1" panose="02020600000000000000" pitchFamily="18" charset="-127"/>
-                <a:ea typeface="a시월구일1" panose="02020600000000000000" pitchFamily="18" charset="-127"/>
-                <a:cs typeface="+mj-cs"/>
-              </a:rPr>
-              <a:t>서울시 자치구별 건강 위험도를 분석하고 시각화 하는 서비스 제공</a:t>
-            </a:r>
-            <a:endParaRPr lang="en-US" altLang="ko-KR" sz="1400" b="1" dirty="0">
-              <a:latin typeface="a시월구일1" panose="02020600000000000000" pitchFamily="18" charset="-127"/>
-              <a:ea typeface="a시월구일1" panose="02020600000000000000" pitchFamily="18" charset="-127"/>
-              <a:cs typeface="+mj-cs"/>
-            </a:endParaRPr>
-          </a:p>
-        </p:txBody>
-      </p:sp>
-      <p:sp>
-        <p:nvSpPr>
-          <p:cNvPr id="91" name="사각형: 둥근 모서리 90">
-            <a:extLst>
-              <a:ext uri="{FF2B5EF4-FFF2-40B4-BE49-F238E27FC236}">
-                <a16:creationId xmlns:a16="http://schemas.microsoft.com/office/drawing/2014/main" id="{5FFED4A5-7F9B-42F2-8A7F-914E6CE18FFD}"/>
-              </a:ext>
-            </a:extLst>
-          </p:cNvPr>
-          <p:cNvSpPr/>
-          <p:nvPr/>
-        </p:nvSpPr>
-        <p:spPr>
-          <a:xfrm>
-            <a:off x="6211068" y="1651294"/>
-            <a:ext cx="5814646" cy="1725969"/>
-          </a:xfrm>
-          <a:prstGeom prst="roundRect">
-            <a:avLst/>
-          </a:prstGeom>
-          <a:solidFill>
-            <a:schemeClr val="bg1"/>
-          </a:solidFill>
-          <a:ln>
-            <a:solidFill>
-              <a:schemeClr val="bg2">
-                <a:lumMod val="90000"/>
-              </a:schemeClr>
-            </a:solidFill>
-          </a:ln>
-        </p:spPr>
-        <p:style>
-          <a:lnRef idx="2">
-            <a:schemeClr val="accent1">
-              <a:shade val="15000"/>
-            </a:schemeClr>
-          </a:lnRef>
-          <a:fillRef idx="1">
-            <a:schemeClr val="accent1"/>
-          </a:fillRef>
-          <a:effectRef idx="0">
-            <a:schemeClr val="accent1"/>
-          </a:effectRef>
-          <a:fontRef idx="minor">
-            <a:schemeClr val="lt1"/>
-          </a:fontRef>
-        </p:style>
-        <p:txBody>
-          <a:bodyPr rtlCol="0" anchor="ctr"/>
-          <a:lstStyle/>
-          <a:p>
-            <a:pPr algn="ctr"/>
-            <a:endParaRPr lang="ko-KR" altLang="en-US"/>
-          </a:p>
-        </p:txBody>
-      </p:sp>
-      <p:sp>
-        <p:nvSpPr>
-          <p:cNvPr id="92" name="사각형: 둥근 모서리 91">
-            <a:extLst>
-              <a:ext uri="{FF2B5EF4-FFF2-40B4-BE49-F238E27FC236}">
-                <a16:creationId xmlns:a16="http://schemas.microsoft.com/office/drawing/2014/main" id="{3ED5BC60-0C7D-4FF9-8473-646C8ED129FF}"/>
-              </a:ext>
-            </a:extLst>
-          </p:cNvPr>
-          <p:cNvSpPr/>
-          <p:nvPr/>
-        </p:nvSpPr>
-        <p:spPr>
-          <a:xfrm>
-            <a:off x="152400" y="1651294"/>
-            <a:ext cx="5814646" cy="1724582"/>
-          </a:xfrm>
-          <a:prstGeom prst="roundRect">
-            <a:avLst/>
-          </a:prstGeom>
-          <a:solidFill>
-            <a:schemeClr val="bg1"/>
-          </a:solidFill>
-          <a:ln>
-            <a:solidFill>
-              <a:schemeClr val="bg2">
-                <a:lumMod val="90000"/>
-              </a:schemeClr>
-            </a:solidFill>
-          </a:ln>
-        </p:spPr>
-        <p:style>
-          <a:lnRef idx="2">
-            <a:schemeClr val="accent1">
-              <a:shade val="15000"/>
-            </a:schemeClr>
-          </a:lnRef>
-          <a:fillRef idx="1">
-            <a:schemeClr val="accent1"/>
-          </a:fillRef>
-          <a:effectRef idx="0">
-            <a:schemeClr val="accent1"/>
-          </a:effectRef>
-          <a:fontRef idx="minor">
-            <a:schemeClr val="lt1"/>
-          </a:fontRef>
-        </p:style>
-        <p:txBody>
-          <a:bodyPr rtlCol="0" anchor="ctr"/>
-          <a:lstStyle/>
-          <a:p>
-            <a:pPr algn="ctr"/>
-            <a:endParaRPr lang="ko-KR" altLang="en-US" dirty="0"/>
-          </a:p>
-        </p:txBody>
-      </p:sp>
-      <p:sp>
-        <p:nvSpPr>
-          <p:cNvPr id="93" name="사각형: 둥근 모서리 92">
-            <a:extLst>
-              <a:ext uri="{FF2B5EF4-FFF2-40B4-BE49-F238E27FC236}">
-                <a16:creationId xmlns:a16="http://schemas.microsoft.com/office/drawing/2014/main" id="{65ED10CD-F0ED-42E1-846F-8DBCCBF7DBC3}"/>
-              </a:ext>
-            </a:extLst>
-          </p:cNvPr>
-          <p:cNvSpPr/>
-          <p:nvPr/>
-        </p:nvSpPr>
-        <p:spPr>
-          <a:xfrm>
-            <a:off x="152400" y="3645044"/>
-            <a:ext cx="5814646" cy="1725969"/>
-          </a:xfrm>
-          <a:prstGeom prst="roundRect">
-            <a:avLst/>
-          </a:prstGeom>
-          <a:solidFill>
-            <a:schemeClr val="bg1"/>
-          </a:solidFill>
-          <a:ln>
-            <a:solidFill>
-              <a:schemeClr val="bg2">
-                <a:lumMod val="90000"/>
-              </a:schemeClr>
-            </a:solidFill>
-          </a:ln>
-        </p:spPr>
-        <p:style>
-          <a:lnRef idx="2">
-            <a:schemeClr val="accent1">
-              <a:shade val="15000"/>
-            </a:schemeClr>
-          </a:lnRef>
-          <a:fillRef idx="1">
-            <a:schemeClr val="accent1"/>
-          </a:fillRef>
-          <a:effectRef idx="0">
-            <a:schemeClr val="accent1"/>
-          </a:effectRef>
-          <a:fontRef idx="minor">
-            <a:schemeClr val="lt1"/>
-          </a:fontRef>
-        </p:style>
-        <p:txBody>
-          <a:bodyPr rtlCol="0" anchor="ctr"/>
-          <a:lstStyle/>
-          <a:p>
-            <a:pPr algn="ctr"/>
-            <a:endParaRPr lang="ko-KR" altLang="en-US"/>
-          </a:p>
-        </p:txBody>
-      </p:sp>
-      <p:sp>
-        <p:nvSpPr>
-          <p:cNvPr id="94" name="사각형: 둥근 모서리 93">
-            <a:extLst>
-              <a:ext uri="{FF2B5EF4-FFF2-40B4-BE49-F238E27FC236}">
-                <a16:creationId xmlns:a16="http://schemas.microsoft.com/office/drawing/2014/main" id="{292DDF5F-AFEF-4D40-8745-69C82947F719}"/>
-              </a:ext>
-            </a:extLst>
-          </p:cNvPr>
-          <p:cNvSpPr/>
-          <p:nvPr/>
-        </p:nvSpPr>
-        <p:spPr>
-          <a:xfrm>
-            <a:off x="6224954" y="3645044"/>
-            <a:ext cx="5814646" cy="1725969"/>
-          </a:xfrm>
-          <a:prstGeom prst="roundRect">
-            <a:avLst/>
-          </a:prstGeom>
-          <a:solidFill>
-            <a:schemeClr val="bg1"/>
-          </a:solidFill>
-          <a:ln>
-            <a:solidFill>
-              <a:schemeClr val="bg2">
-                <a:lumMod val="90000"/>
-              </a:schemeClr>
-            </a:solidFill>
-          </a:ln>
-        </p:spPr>
-        <p:style>
-          <a:lnRef idx="2">
-            <a:schemeClr val="accent1">
-              <a:shade val="15000"/>
-            </a:schemeClr>
-          </a:lnRef>
-          <a:fillRef idx="1">
-            <a:schemeClr val="accent1"/>
-          </a:fillRef>
-          <a:effectRef idx="0">
-            <a:schemeClr val="accent1"/>
-          </a:effectRef>
-          <a:fontRef idx="minor">
-            <a:schemeClr val="lt1"/>
-          </a:fontRef>
-        </p:style>
-        <p:txBody>
-          <a:bodyPr rtlCol="0" anchor="ctr"/>
-          <a:lstStyle/>
-          <a:p>
-            <a:pPr algn="ctr"/>
-            <a:endParaRPr lang="ko-KR" altLang="en-US"/>
-          </a:p>
-        </p:txBody>
-      </p:sp>
-      <p:sp>
-        <p:nvSpPr>
-          <p:cNvPr id="97" name="TextBox 96">
-            <a:extLst>
-              <a:ext uri="{FF2B5EF4-FFF2-40B4-BE49-F238E27FC236}">
-                <a16:creationId xmlns:a16="http://schemas.microsoft.com/office/drawing/2014/main" id="{7FA04D3E-B547-4619-B6E9-852437F94E3A}"/>
-              </a:ext>
-            </a:extLst>
-          </p:cNvPr>
-          <p:cNvSpPr txBox="1"/>
-          <p:nvPr/>
-        </p:nvSpPr>
-        <p:spPr>
-          <a:xfrm>
-            <a:off x="1130289" y="1846803"/>
-            <a:ext cx="1344920" cy="407804"/>
-          </a:xfrm>
-          <a:prstGeom prst="rect">
-            <a:avLst/>
-          </a:prstGeom>
-          <a:noFill/>
-        </p:spPr>
-        <p:txBody>
-          <a:bodyPr wrap="none" lIns="0" tIns="0" rIns="0" bIns="0" rtlCol="0" anchor="t">
-            <a:spAutoFit/>
-          </a:bodyPr>
-          <a:lstStyle/>
-          <a:p>
-            <a:pPr>
-              <a:lnSpc>
-                <a:spcPct val="150000"/>
-              </a:lnSpc>
-            </a:pPr>
-            <a:r>
-              <a:rPr kumimoji="1" lang="ko-KR" altLang="en-US" sz="2000" dirty="0">
-                <a:ln w="12700">
-                  <a:solidFill>
-                    <a:schemeClr val="tx1">
-                      <a:alpha val="5000"/>
-                    </a:schemeClr>
-                  </a:solidFill>
-                </a:ln>
-                <a:solidFill>
-                  <a:schemeClr val="tx1">
-                    <a:lumMod val="85000"/>
-                    <a:lumOff val="15000"/>
-                  </a:schemeClr>
-                </a:solidFill>
-                <a:latin typeface="a시월구일4" panose="02020600000000000000" pitchFamily="18" charset="-127"/>
-                <a:ea typeface="a시월구일4" panose="02020600000000000000" pitchFamily="18" charset="-127"/>
-                <a:cs typeface="Pretendard" panose="02000503000000020004" pitchFamily="2" charset="-127"/>
-              </a:rPr>
-              <a:t>프로젝트 명</a:t>
-            </a:r>
-            <a:endParaRPr kumimoji="1" lang="en-US" altLang="ko-KR" sz="2000" dirty="0">
-              <a:ln w="12700">
-                <a:solidFill>
-                  <a:schemeClr val="tx1">
-                    <a:alpha val="5000"/>
-                  </a:schemeClr>
-                </a:solidFill>
-              </a:ln>
-              <a:solidFill>
-                <a:schemeClr val="tx1">
-                  <a:lumMod val="85000"/>
-                  <a:lumOff val="15000"/>
-                </a:schemeClr>
-              </a:solidFill>
-              <a:latin typeface="a시월구일4" panose="02020600000000000000" pitchFamily="18" charset="-127"/>
-              <a:ea typeface="a시월구일4" panose="02020600000000000000" pitchFamily="18" charset="-127"/>
-              <a:cs typeface="Pretendard" panose="02000503000000020004" pitchFamily="2" charset="-127"/>
-            </a:endParaRPr>
-          </a:p>
-        </p:txBody>
-      </p:sp>
-      <p:sp>
-        <p:nvSpPr>
-          <p:cNvPr id="99" name="TextBox 98">
-            <a:extLst>
-              <a:ext uri="{FF2B5EF4-FFF2-40B4-BE49-F238E27FC236}">
-                <a16:creationId xmlns:a16="http://schemas.microsoft.com/office/drawing/2014/main" id="{B82AC70E-D369-45A8-9996-D462BCBDA475}"/>
-              </a:ext>
-            </a:extLst>
-          </p:cNvPr>
-          <p:cNvSpPr txBox="1"/>
-          <p:nvPr/>
-        </p:nvSpPr>
-        <p:spPr>
-          <a:xfrm>
-            <a:off x="1130289" y="2377208"/>
-            <a:ext cx="4762510" cy="695575"/>
-          </a:xfrm>
-          <a:prstGeom prst="rect">
-            <a:avLst/>
-          </a:prstGeom>
-          <a:noFill/>
-        </p:spPr>
-        <p:txBody>
-          <a:bodyPr wrap="square" lIns="0" tIns="0" rIns="0" bIns="0" rtlCol="0" anchor="t">
-            <a:spAutoFit/>
-          </a:bodyPr>
-          <a:lstStyle/>
-          <a:p>
-            <a:pPr latinLnBrk="0">
-              <a:lnSpc>
-                <a:spcPct val="150000"/>
-              </a:lnSpc>
-            </a:pPr>
-            <a:r>
-              <a:rPr kumimoji="1" lang="ko-KR" altLang="en-US" sz="1600" dirty="0">
-                <a:ln w="12700">
-                  <a:solidFill>
-                    <a:schemeClr val="tx1">
-                      <a:alpha val="5000"/>
-                    </a:schemeClr>
-                  </a:solidFill>
-                </a:ln>
-                <a:solidFill>
-                  <a:schemeClr val="tx1">
-                    <a:lumMod val="85000"/>
-                    <a:lumOff val="15000"/>
-                  </a:schemeClr>
-                </a:solidFill>
-                <a:latin typeface="a시월구일1" panose="02020600000000000000" pitchFamily="18" charset="-127"/>
-                <a:ea typeface="a시월구일1" panose="02020600000000000000" pitchFamily="18" charset="-127"/>
-                <a:cs typeface="Pretendard" panose="02000503000000020004" pitchFamily="2" charset="-127"/>
-              </a:rPr>
-              <a:t>서울시 자치구별 보건 취약 유형 분석 및 정책 지원 시스템 개발</a:t>
-            </a:r>
-          </a:p>
-        </p:txBody>
-      </p:sp>
-      <p:sp>
-        <p:nvSpPr>
-          <p:cNvPr id="103" name="TextBox 102">
-            <a:extLst>
-              <a:ext uri="{FF2B5EF4-FFF2-40B4-BE49-F238E27FC236}">
-                <a16:creationId xmlns:a16="http://schemas.microsoft.com/office/drawing/2014/main" id="{00F2605C-6ACF-4948-8660-EACC4B3218EC}"/>
-              </a:ext>
-            </a:extLst>
-          </p:cNvPr>
-          <p:cNvSpPr txBox="1"/>
-          <p:nvPr/>
-        </p:nvSpPr>
-        <p:spPr>
-          <a:xfrm>
-            <a:off x="7312354" y="1846803"/>
-            <a:ext cx="1098058" cy="407804"/>
-          </a:xfrm>
-          <a:prstGeom prst="rect">
-            <a:avLst/>
-          </a:prstGeom>
-          <a:noFill/>
-        </p:spPr>
-        <p:txBody>
-          <a:bodyPr wrap="none" lIns="0" tIns="0" rIns="0" bIns="0" rtlCol="0" anchor="t">
-            <a:spAutoFit/>
-          </a:bodyPr>
-          <a:lstStyle/>
-          <a:p>
-            <a:pPr>
-              <a:lnSpc>
-                <a:spcPct val="150000"/>
-              </a:lnSpc>
-            </a:pPr>
-            <a:r>
-              <a:rPr kumimoji="1" lang="ko-KR" altLang="en-US" sz="2000" dirty="0">
-                <a:ln w="12700">
-                  <a:solidFill>
-                    <a:schemeClr val="tx1">
-                      <a:alpha val="5000"/>
-                    </a:schemeClr>
-                  </a:solidFill>
-                </a:ln>
-                <a:solidFill>
-                  <a:schemeClr val="tx1">
-                    <a:lumMod val="85000"/>
-                    <a:lumOff val="15000"/>
-                  </a:schemeClr>
-                </a:solidFill>
-                <a:latin typeface="a시월구일4" panose="02020600000000000000" pitchFamily="18" charset="-127"/>
-                <a:ea typeface="a시월구일4" panose="02020600000000000000" pitchFamily="18" charset="-127"/>
-                <a:cs typeface="Pretendard" panose="02000503000000020004" pitchFamily="2" charset="-127"/>
-              </a:rPr>
-              <a:t>개발 분야</a:t>
-            </a:r>
-            <a:endParaRPr kumimoji="1" lang="en-US" altLang="ko-KR" sz="2000" dirty="0">
-              <a:ln w="12700">
-                <a:solidFill>
-                  <a:schemeClr val="tx1">
-                    <a:alpha val="5000"/>
-                  </a:schemeClr>
-                </a:solidFill>
-              </a:ln>
-              <a:solidFill>
-                <a:schemeClr val="tx1">
-                  <a:lumMod val="85000"/>
-                  <a:lumOff val="15000"/>
-                </a:schemeClr>
-              </a:solidFill>
-              <a:latin typeface="a시월구일4" panose="02020600000000000000" pitchFamily="18" charset="-127"/>
-              <a:ea typeface="a시월구일4" panose="02020600000000000000" pitchFamily="18" charset="-127"/>
-              <a:cs typeface="Pretendard" panose="02000503000000020004" pitchFamily="2" charset="-127"/>
-            </a:endParaRPr>
-          </a:p>
-        </p:txBody>
-      </p:sp>
-      <p:sp>
-        <p:nvSpPr>
-          <p:cNvPr id="104" name="TextBox 103">
-            <a:extLst>
-              <a:ext uri="{FF2B5EF4-FFF2-40B4-BE49-F238E27FC236}">
-                <a16:creationId xmlns:a16="http://schemas.microsoft.com/office/drawing/2014/main" id="{9A69A0C8-9CEA-45A4-B378-F913F64486B2}"/>
-              </a:ext>
-            </a:extLst>
-          </p:cNvPr>
-          <p:cNvSpPr txBox="1"/>
-          <p:nvPr/>
-        </p:nvSpPr>
-        <p:spPr>
-          <a:xfrm>
-            <a:off x="7112870" y="2478774"/>
-            <a:ext cx="4762510" cy="246221"/>
-          </a:xfrm>
-          <a:prstGeom prst="rect">
-            <a:avLst/>
-          </a:prstGeom>
-          <a:noFill/>
-        </p:spPr>
-        <p:txBody>
-          <a:bodyPr wrap="square" lIns="0" tIns="0" rIns="0" bIns="0" rtlCol="0" anchor="t">
-            <a:spAutoFit/>
-          </a:bodyPr>
-          <a:lstStyle/>
-          <a:p>
-            <a:r>
-              <a:rPr lang="ko-KR" altLang="en-US" sz="1600" dirty="0" err="1">
-                <a:latin typeface="a시월구일1" panose="02020600000000000000" pitchFamily="18" charset="-127"/>
-                <a:ea typeface="a시월구일1" panose="02020600000000000000" pitchFamily="18" charset="-127"/>
-              </a:rPr>
-              <a:t>머신러닝</a:t>
-            </a:r>
-            <a:r>
-              <a:rPr lang="ko-KR" altLang="en-US" sz="1600" dirty="0">
-                <a:latin typeface="a시월구일1" panose="02020600000000000000" pitchFamily="18" charset="-127"/>
-                <a:ea typeface="a시월구일1" panose="02020600000000000000" pitchFamily="18" charset="-127"/>
-              </a:rPr>
-              <a:t> 기반 데이터 분석 및 군집화 모델</a:t>
-            </a:r>
-          </a:p>
-        </p:txBody>
-      </p:sp>
-      <p:sp>
-        <p:nvSpPr>
-          <p:cNvPr id="108" name="TextBox 107">
-            <a:extLst>
-              <a:ext uri="{FF2B5EF4-FFF2-40B4-BE49-F238E27FC236}">
-                <a16:creationId xmlns:a16="http://schemas.microsoft.com/office/drawing/2014/main" id="{81515E1C-57DC-4AE2-91AB-A1F75EE8AE9C}"/>
-              </a:ext>
-            </a:extLst>
-          </p:cNvPr>
-          <p:cNvSpPr txBox="1"/>
-          <p:nvPr/>
-        </p:nvSpPr>
-        <p:spPr>
-          <a:xfrm>
-            <a:off x="1222963" y="3867903"/>
-            <a:ext cx="1099660" cy="407804"/>
-          </a:xfrm>
-          <a:prstGeom prst="rect">
-            <a:avLst/>
-          </a:prstGeom>
-          <a:noFill/>
-        </p:spPr>
-        <p:txBody>
-          <a:bodyPr wrap="none" lIns="0" tIns="0" rIns="0" bIns="0" rtlCol="0" anchor="t">
-            <a:spAutoFit/>
-          </a:bodyPr>
-          <a:lstStyle/>
-          <a:p>
-            <a:pPr>
-              <a:lnSpc>
-                <a:spcPct val="150000"/>
-              </a:lnSpc>
-            </a:pPr>
-            <a:r>
-              <a:rPr kumimoji="1" lang="ko-KR" altLang="en-US" sz="2000" dirty="0">
-                <a:ln w="12700">
-                  <a:solidFill>
-                    <a:schemeClr val="tx1">
-                      <a:alpha val="5000"/>
-                    </a:schemeClr>
-                  </a:solidFill>
-                </a:ln>
-                <a:solidFill>
-                  <a:schemeClr val="tx1">
-                    <a:lumMod val="85000"/>
-                    <a:lumOff val="15000"/>
-                  </a:schemeClr>
-                </a:solidFill>
-                <a:latin typeface="a시월구일4" panose="02020600000000000000" pitchFamily="18" charset="-127"/>
-                <a:ea typeface="a시월구일4" panose="02020600000000000000" pitchFamily="18" charset="-127"/>
-                <a:cs typeface="Pretendard" panose="02000503000000020004" pitchFamily="2" charset="-127"/>
-              </a:rPr>
-              <a:t>개발 기간</a:t>
-            </a:r>
-            <a:endParaRPr kumimoji="1" lang="en-US" altLang="ko-KR" sz="2000" dirty="0">
-              <a:ln w="12700">
-                <a:solidFill>
-                  <a:schemeClr val="tx1">
-                    <a:alpha val="5000"/>
-                  </a:schemeClr>
-                </a:solidFill>
-              </a:ln>
-              <a:solidFill>
-                <a:schemeClr val="tx1">
-                  <a:lumMod val="85000"/>
-                  <a:lumOff val="15000"/>
-                </a:schemeClr>
-              </a:solidFill>
-              <a:latin typeface="a시월구일4" panose="02020600000000000000" pitchFamily="18" charset="-127"/>
-              <a:ea typeface="a시월구일4" panose="02020600000000000000" pitchFamily="18" charset="-127"/>
-              <a:cs typeface="Pretendard" panose="02000503000000020004" pitchFamily="2" charset="-127"/>
-            </a:endParaRPr>
-          </a:p>
-        </p:txBody>
-      </p:sp>
-      <p:sp>
-        <p:nvSpPr>
-          <p:cNvPr id="112" name="TextBox 111">
-            <a:extLst>
-              <a:ext uri="{FF2B5EF4-FFF2-40B4-BE49-F238E27FC236}">
-                <a16:creationId xmlns:a16="http://schemas.microsoft.com/office/drawing/2014/main" id="{6F0DB6CD-D44C-4774-B9FF-428EDA30A2FD}"/>
-              </a:ext>
-            </a:extLst>
-          </p:cNvPr>
-          <p:cNvSpPr txBox="1"/>
-          <p:nvPr/>
-        </p:nvSpPr>
-        <p:spPr>
-          <a:xfrm>
-            <a:off x="7312354" y="3826792"/>
-            <a:ext cx="1099660" cy="407804"/>
-          </a:xfrm>
-          <a:prstGeom prst="rect">
-            <a:avLst/>
-          </a:prstGeom>
-          <a:noFill/>
-        </p:spPr>
-        <p:txBody>
-          <a:bodyPr wrap="none" lIns="0" tIns="0" rIns="0" bIns="0" rtlCol="0" anchor="t">
-            <a:spAutoFit/>
-          </a:bodyPr>
-          <a:lstStyle/>
-          <a:p>
-            <a:pPr>
-              <a:lnSpc>
-                <a:spcPct val="150000"/>
-              </a:lnSpc>
-            </a:pPr>
-            <a:r>
-              <a:rPr kumimoji="1" lang="ko-KR" altLang="en-US" sz="2000" dirty="0">
-                <a:ln w="12700">
-                  <a:solidFill>
-                    <a:schemeClr val="tx1">
-                      <a:alpha val="5000"/>
-                    </a:schemeClr>
-                  </a:solidFill>
-                </a:ln>
-                <a:solidFill>
-                  <a:schemeClr val="tx1">
-                    <a:lumMod val="85000"/>
-                    <a:lumOff val="15000"/>
-                  </a:schemeClr>
-                </a:solidFill>
-                <a:latin typeface="a시월구일4" panose="02020600000000000000" pitchFamily="18" charset="-127"/>
-                <a:ea typeface="a시월구일4" panose="02020600000000000000" pitchFamily="18" charset="-127"/>
-                <a:cs typeface="Pretendard" panose="02000503000000020004" pitchFamily="2" charset="-127"/>
-              </a:rPr>
-              <a:t>개발 인원</a:t>
-            </a:r>
-            <a:endParaRPr kumimoji="1" lang="en-US" altLang="ko-KR" sz="2000" dirty="0">
-              <a:ln w="12700">
-                <a:solidFill>
-                  <a:schemeClr val="tx1">
-                    <a:alpha val="5000"/>
-                  </a:schemeClr>
-                </a:solidFill>
-              </a:ln>
-              <a:solidFill>
-                <a:schemeClr val="tx1">
-                  <a:lumMod val="85000"/>
-                  <a:lumOff val="15000"/>
-                </a:schemeClr>
-              </a:solidFill>
-              <a:latin typeface="a시월구일4" panose="02020600000000000000" pitchFamily="18" charset="-127"/>
-              <a:ea typeface="a시월구일4" panose="02020600000000000000" pitchFamily="18" charset="-127"/>
-              <a:cs typeface="Pretendard" panose="02000503000000020004" pitchFamily="2" charset="-127"/>
-            </a:endParaRPr>
-          </a:p>
-        </p:txBody>
-      </p:sp>
-      <p:sp>
-        <p:nvSpPr>
-          <p:cNvPr id="113" name="TextBox 112">
-            <a:extLst>
-              <a:ext uri="{FF2B5EF4-FFF2-40B4-BE49-F238E27FC236}">
-                <a16:creationId xmlns:a16="http://schemas.microsoft.com/office/drawing/2014/main" id="{02CD95EE-66CC-40CD-9090-9F9A1E1DF91C}"/>
-              </a:ext>
-            </a:extLst>
-          </p:cNvPr>
-          <p:cNvSpPr txBox="1"/>
-          <p:nvPr/>
-        </p:nvSpPr>
-        <p:spPr>
-          <a:xfrm>
-            <a:off x="1154573" y="4498566"/>
-            <a:ext cx="2927360" cy="609398"/>
-          </a:xfrm>
-          <a:prstGeom prst="rect">
-            <a:avLst/>
-          </a:prstGeom>
-          <a:noFill/>
-        </p:spPr>
-        <p:txBody>
-          <a:bodyPr wrap="square" lIns="0" tIns="0" rIns="0" bIns="0" rtlCol="0" anchor="t">
-            <a:spAutoFit/>
-          </a:bodyPr>
-          <a:lstStyle/>
-          <a:p>
-            <a:pPr>
-              <a:lnSpc>
-                <a:spcPct val="130000"/>
-              </a:lnSpc>
-            </a:pPr>
-            <a:r>
-              <a:rPr lang="en-US" altLang="ko-KR" sz="1600" dirty="0">
-                <a:latin typeface="a시월구일1" panose="02020600000000000000" pitchFamily="18" charset="-127"/>
-                <a:ea typeface="a시월구일1" panose="02020600000000000000" pitchFamily="18" charset="-127"/>
-                <a:cs typeface="+mj-cs"/>
-              </a:rPr>
-              <a:t>2026.03.17 ~ 04.17 </a:t>
-            </a:r>
-          </a:p>
-          <a:p>
-            <a:pPr>
-              <a:lnSpc>
-                <a:spcPct val="130000"/>
-              </a:lnSpc>
-            </a:pPr>
-            <a:r>
-              <a:rPr lang="en-US" altLang="ko-KR" sz="1600" dirty="0">
-                <a:solidFill>
-                  <a:schemeClr val="tx1">
-                    <a:lumMod val="50000"/>
-                    <a:lumOff val="50000"/>
-                  </a:schemeClr>
-                </a:solidFill>
-                <a:latin typeface="a시월구일1" panose="02020600000000000000" pitchFamily="18" charset="-127"/>
-                <a:ea typeface="a시월구일1" panose="02020600000000000000" pitchFamily="18" charset="-127"/>
-                <a:cs typeface="+mj-cs"/>
-              </a:rPr>
-              <a:t>(</a:t>
-            </a:r>
-            <a:r>
-              <a:rPr lang="ko-KR" altLang="en-US" sz="1600" dirty="0">
-                <a:solidFill>
-                  <a:schemeClr val="tx1">
-                    <a:lumMod val="50000"/>
-                    <a:lumOff val="50000"/>
-                  </a:schemeClr>
-                </a:solidFill>
-                <a:latin typeface="a시월구일1" panose="02020600000000000000" pitchFamily="18" charset="-127"/>
-                <a:ea typeface="a시월구일1" panose="02020600000000000000" pitchFamily="18" charset="-127"/>
-                <a:cs typeface="+mj-cs"/>
-              </a:rPr>
-              <a:t>약 </a:t>
-            </a:r>
-            <a:r>
-              <a:rPr lang="en-US" altLang="ko-KR" sz="1600" dirty="0">
-                <a:solidFill>
-                  <a:schemeClr val="tx1">
-                    <a:lumMod val="50000"/>
-                    <a:lumOff val="50000"/>
-                  </a:schemeClr>
-                </a:solidFill>
-                <a:latin typeface="a시월구일1" panose="02020600000000000000" pitchFamily="18" charset="-127"/>
-                <a:ea typeface="a시월구일1" panose="02020600000000000000" pitchFamily="18" charset="-127"/>
-                <a:cs typeface="+mj-cs"/>
-              </a:rPr>
-              <a:t>1</a:t>
-            </a:r>
-            <a:r>
-              <a:rPr lang="ko-KR" altLang="en-US" sz="1600" dirty="0">
-                <a:solidFill>
-                  <a:schemeClr val="tx1">
-                    <a:lumMod val="50000"/>
-                    <a:lumOff val="50000"/>
-                  </a:schemeClr>
-                </a:solidFill>
-                <a:latin typeface="a시월구일1" panose="02020600000000000000" pitchFamily="18" charset="-127"/>
-                <a:ea typeface="a시월구일1" panose="02020600000000000000" pitchFamily="18" charset="-127"/>
-                <a:cs typeface="+mj-cs"/>
-              </a:rPr>
-              <a:t>개월</a:t>
-            </a:r>
-            <a:r>
-              <a:rPr lang="en-US" altLang="ko-KR" sz="1600" dirty="0">
-                <a:solidFill>
-                  <a:schemeClr val="tx1">
-                    <a:lumMod val="50000"/>
-                    <a:lumOff val="50000"/>
-                  </a:schemeClr>
-                </a:solidFill>
-                <a:latin typeface="a시월구일1" panose="02020600000000000000" pitchFamily="18" charset="-127"/>
-                <a:ea typeface="a시월구일1" panose="02020600000000000000" pitchFamily="18" charset="-127"/>
-                <a:cs typeface="+mj-cs"/>
-              </a:rPr>
-              <a:t>)</a:t>
-            </a:r>
-          </a:p>
-        </p:txBody>
-      </p:sp>
-      <p:sp>
-        <p:nvSpPr>
-          <p:cNvPr id="114" name="TextBox 113">
-            <a:extLst>
-              <a:ext uri="{FF2B5EF4-FFF2-40B4-BE49-F238E27FC236}">
-                <a16:creationId xmlns:a16="http://schemas.microsoft.com/office/drawing/2014/main" id="{5D0243F3-54D0-4BCE-9914-3D481F4064DF}"/>
-              </a:ext>
-            </a:extLst>
-          </p:cNvPr>
-          <p:cNvSpPr txBox="1"/>
-          <p:nvPr/>
-        </p:nvSpPr>
-        <p:spPr>
-          <a:xfrm>
-            <a:off x="7137153" y="4498566"/>
-            <a:ext cx="4762510" cy="305853"/>
-          </a:xfrm>
-          <a:prstGeom prst="rect">
-            <a:avLst/>
-          </a:prstGeom>
-          <a:noFill/>
-        </p:spPr>
-        <p:txBody>
-          <a:bodyPr wrap="square" lIns="0" tIns="0" rIns="0" bIns="0" rtlCol="0" anchor="t">
-            <a:spAutoFit/>
-          </a:bodyPr>
-          <a:lstStyle/>
-          <a:p>
-            <a:pPr latinLnBrk="0">
-              <a:lnSpc>
-                <a:spcPct val="150000"/>
-              </a:lnSpc>
-            </a:pPr>
-            <a:r>
-              <a:rPr kumimoji="1" lang="ko-KR" altLang="en-US" sz="1500" dirty="0">
-                <a:ln w="12700">
-                  <a:solidFill>
-                    <a:schemeClr val="tx1">
-                      <a:alpha val="5000"/>
-                    </a:schemeClr>
-                  </a:solidFill>
-                </a:ln>
-                <a:solidFill>
-                  <a:schemeClr val="tx1">
-                    <a:lumMod val="85000"/>
-                    <a:lumOff val="15000"/>
-                  </a:schemeClr>
-                </a:solidFill>
-                <a:latin typeface="a시월구일1" panose="02020600000000000000" pitchFamily="18" charset="-127"/>
-                <a:ea typeface="a시월구일1" panose="02020600000000000000" pitchFamily="18" charset="-127"/>
-                <a:cs typeface="Pretendard" panose="02000503000000020004" pitchFamily="2" charset="-127"/>
-              </a:rPr>
-              <a:t>총 </a:t>
-            </a:r>
-            <a:r>
-              <a:rPr kumimoji="1" lang="en-US" altLang="ko-KR" sz="1500" dirty="0">
-                <a:ln w="12700">
-                  <a:solidFill>
-                    <a:schemeClr val="tx1">
-                      <a:alpha val="5000"/>
-                    </a:schemeClr>
-                  </a:solidFill>
-                </a:ln>
-                <a:solidFill>
-                  <a:schemeClr val="tx1">
-                    <a:lumMod val="85000"/>
-                    <a:lumOff val="15000"/>
-                  </a:schemeClr>
-                </a:solidFill>
-                <a:latin typeface="a시월구일1" panose="02020600000000000000" pitchFamily="18" charset="-127"/>
-                <a:ea typeface="a시월구일1" panose="02020600000000000000" pitchFamily="18" charset="-127"/>
-                <a:cs typeface="Pretendard" panose="02000503000000020004" pitchFamily="2" charset="-127"/>
-              </a:rPr>
-              <a:t>2</a:t>
-            </a:r>
-            <a:r>
-              <a:rPr kumimoji="1" lang="ko-KR" altLang="en-US" sz="1500" dirty="0">
-                <a:ln w="12700">
-                  <a:solidFill>
-                    <a:schemeClr val="tx1">
-                      <a:alpha val="5000"/>
-                    </a:schemeClr>
-                  </a:solidFill>
-                </a:ln>
-                <a:solidFill>
-                  <a:schemeClr val="tx1">
-                    <a:lumMod val="85000"/>
-                    <a:lumOff val="15000"/>
-                  </a:schemeClr>
-                </a:solidFill>
-                <a:latin typeface="a시월구일1" panose="02020600000000000000" pitchFamily="18" charset="-127"/>
-                <a:ea typeface="a시월구일1" panose="02020600000000000000" pitchFamily="18" charset="-127"/>
-                <a:cs typeface="Pretendard" panose="02000503000000020004" pitchFamily="2" charset="-127"/>
-              </a:rPr>
-              <a:t>명</a:t>
-            </a:r>
-            <a:endParaRPr kumimoji="1" lang="en-US" altLang="ko-KR" sz="1500" dirty="0">
-              <a:ln w="12700">
-                <a:solidFill>
-                  <a:schemeClr val="tx1">
-                    <a:alpha val="5000"/>
-                  </a:schemeClr>
-                </a:solidFill>
-              </a:ln>
-              <a:solidFill>
-                <a:schemeClr val="tx1">
-                  <a:lumMod val="85000"/>
-                  <a:lumOff val="15000"/>
-                </a:schemeClr>
-              </a:solidFill>
-              <a:latin typeface="a시월구일1" panose="02020600000000000000" pitchFamily="18" charset="-127"/>
-              <a:ea typeface="a시월구일1" panose="02020600000000000000" pitchFamily="18" charset="-127"/>
-              <a:cs typeface="Pretendard" panose="02000503000000020004" pitchFamily="2" charset="-127"/>
-            </a:endParaRPr>
-          </a:p>
-        </p:txBody>
-      </p:sp>
-      <p:grpSp>
-        <p:nvGrpSpPr>
-          <p:cNvPr id="52" name="그룹 51">
-            <a:extLst>
-              <a:ext uri="{FF2B5EF4-FFF2-40B4-BE49-F238E27FC236}">
-                <a16:creationId xmlns:a16="http://schemas.microsoft.com/office/drawing/2014/main" id="{E0DD646D-920B-4234-BA41-FA6EA7989E7E}"/>
-              </a:ext>
-            </a:extLst>
-          </p:cNvPr>
-          <p:cNvGrpSpPr/>
-          <p:nvPr/>
-        </p:nvGrpSpPr>
-        <p:grpSpPr>
-          <a:xfrm>
-            <a:off x="6439237" y="3803520"/>
-            <a:ext cx="658835" cy="658835"/>
-            <a:chOff x="523645" y="3960769"/>
-            <a:chExt cx="658835" cy="658835"/>
-          </a:xfrm>
-        </p:grpSpPr>
-        <p:sp>
-          <p:nvSpPr>
-            <p:cNvPr id="35" name="타원 34">
-              <a:extLst>
-                <a:ext uri="{FF2B5EF4-FFF2-40B4-BE49-F238E27FC236}">
-                  <a16:creationId xmlns:a16="http://schemas.microsoft.com/office/drawing/2014/main" id="{5A8CA19B-1C5E-48BB-AED5-E69D46C40ABE}"/>
-                </a:ext>
-              </a:extLst>
-            </p:cNvPr>
-            <p:cNvSpPr/>
-            <p:nvPr/>
-          </p:nvSpPr>
-          <p:spPr>
-            <a:xfrm>
-              <a:off x="523645" y="3960769"/>
-              <a:ext cx="658835" cy="658835"/>
-            </a:xfrm>
-            <a:prstGeom prst="ellipse">
-              <a:avLst/>
-            </a:prstGeom>
-            <a:solidFill>
-              <a:schemeClr val="bg1"/>
-            </a:solidFill>
-            <a:ln w="9525">
-              <a:solidFill>
-                <a:schemeClr val="bg2">
-                  <a:lumMod val="90000"/>
-                </a:schemeClr>
-              </a:solidFill>
-            </a:ln>
-          </p:spPr>
-          <p:style>
-            <a:lnRef idx="2">
-              <a:schemeClr val="accent1">
-                <a:shade val="50000"/>
-              </a:schemeClr>
-            </a:lnRef>
-            <a:fillRef idx="1">
-              <a:schemeClr val="accent1"/>
-            </a:fillRef>
-            <a:effectRef idx="0">
-              <a:schemeClr val="accent1"/>
-            </a:effectRef>
-            <a:fontRef idx="minor">
-              <a:schemeClr val="lt1"/>
-            </a:fontRef>
-          </p:style>
-          <p:txBody>
-            <a:bodyPr rtlCol="0" anchor="ctr"/>
-            <a:lstStyle/>
-            <a:p>
-              <a:pPr algn="ctr"/>
-              <a:endParaRPr lang="ko-KR" altLang="en-US"/>
-            </a:p>
-          </p:txBody>
-        </p:sp>
-        <p:pic>
-          <p:nvPicPr>
-            <p:cNvPr id="46" name="그래픽 45" descr="사용자 단색으로 채워진">
-              <a:extLst>
-                <a:ext uri="{FF2B5EF4-FFF2-40B4-BE49-F238E27FC236}">
-                  <a16:creationId xmlns:a16="http://schemas.microsoft.com/office/drawing/2014/main" id="{006C9251-0891-4122-AAAB-072305060101}"/>
-                </a:ext>
-              </a:extLst>
-            </p:cNvPr>
-            <p:cNvPicPr>
-              <a:picLocks noChangeAspect="1"/>
-            </p:cNvPicPr>
-            <p:nvPr/>
-          </p:nvPicPr>
-          <p:blipFill>
-            <a:blip r:embed="rId2">
-              <a:extLst>
-                <a:ext uri="{28A0092B-C50C-407E-A947-70E740481C1C}">
-                  <a14:useLocalDpi xmlns:a14="http://schemas.microsoft.com/office/drawing/2010/main" val="0"/>
-                </a:ext>
-                <a:ext uri="{96DAC541-7B7A-43D3-8B79-37D633B846F1}">
-                  <asvg:svgBlip xmlns:asvg="http://schemas.microsoft.com/office/drawing/2016/SVG/main" r:embed="rId3"/>
-                </a:ext>
-              </a:extLst>
-            </a:blip>
-            <a:stretch>
-              <a:fillRect/>
-            </a:stretch>
-          </p:blipFill>
-          <p:spPr>
-            <a:xfrm>
-              <a:off x="637062" y="4055510"/>
-              <a:ext cx="432000" cy="432000"/>
-            </a:xfrm>
-            <a:prstGeom prst="rect">
-              <a:avLst/>
-            </a:prstGeom>
-          </p:spPr>
-        </p:pic>
-      </p:grpSp>
-      <p:grpSp>
-        <p:nvGrpSpPr>
-          <p:cNvPr id="51" name="그룹 50">
-            <a:extLst>
-              <a:ext uri="{FF2B5EF4-FFF2-40B4-BE49-F238E27FC236}">
-                <a16:creationId xmlns:a16="http://schemas.microsoft.com/office/drawing/2014/main" id="{8EF574BC-72B3-4F97-BF5F-E6CBC3195622}"/>
-              </a:ext>
-            </a:extLst>
-          </p:cNvPr>
-          <p:cNvGrpSpPr/>
-          <p:nvPr/>
-        </p:nvGrpSpPr>
-        <p:grpSpPr>
-          <a:xfrm>
-            <a:off x="289045" y="3834332"/>
-            <a:ext cx="658835" cy="658835"/>
-            <a:chOff x="523645" y="2770165"/>
-            <a:chExt cx="658835" cy="658835"/>
-          </a:xfrm>
-        </p:grpSpPr>
-        <p:sp>
-          <p:nvSpPr>
-            <p:cNvPr id="31" name="타원 30">
-              <a:extLst>
-                <a:ext uri="{FF2B5EF4-FFF2-40B4-BE49-F238E27FC236}">
-                  <a16:creationId xmlns:a16="http://schemas.microsoft.com/office/drawing/2014/main" id="{CFF365A4-8482-4B6A-BFDF-8C0E23681FC7}"/>
-                </a:ext>
-              </a:extLst>
-            </p:cNvPr>
-            <p:cNvSpPr/>
-            <p:nvPr/>
-          </p:nvSpPr>
-          <p:spPr>
-            <a:xfrm>
-              <a:off x="523645" y="2770165"/>
-              <a:ext cx="658835" cy="658835"/>
-            </a:xfrm>
-            <a:prstGeom prst="ellipse">
-              <a:avLst/>
-            </a:prstGeom>
-            <a:solidFill>
-              <a:schemeClr val="bg1"/>
-            </a:solidFill>
-            <a:ln w="9525">
-              <a:solidFill>
-                <a:schemeClr val="bg2">
-                  <a:lumMod val="90000"/>
-                </a:schemeClr>
-              </a:solidFill>
-            </a:ln>
-          </p:spPr>
-          <p:style>
-            <a:lnRef idx="2">
-              <a:schemeClr val="accent1">
-                <a:shade val="50000"/>
-              </a:schemeClr>
-            </a:lnRef>
-            <a:fillRef idx="1">
-              <a:schemeClr val="accent1"/>
-            </a:fillRef>
-            <a:effectRef idx="0">
-              <a:schemeClr val="accent1"/>
-            </a:effectRef>
-            <a:fontRef idx="minor">
-              <a:schemeClr val="lt1"/>
-            </a:fontRef>
-          </p:style>
-          <p:txBody>
-            <a:bodyPr rtlCol="0" anchor="ctr"/>
-            <a:lstStyle/>
-            <a:p>
-              <a:pPr algn="ctr"/>
-              <a:endParaRPr lang="ko-KR" altLang="en-US"/>
-            </a:p>
-          </p:txBody>
-        </p:sp>
-        <p:pic>
-          <p:nvPicPr>
-            <p:cNvPr id="15" name="그림 14">
-              <a:extLst>
-                <a:ext uri="{FF2B5EF4-FFF2-40B4-BE49-F238E27FC236}">
-                  <a16:creationId xmlns:a16="http://schemas.microsoft.com/office/drawing/2014/main" id="{1ED6A825-7183-4814-8AAB-EC73AA0AFECF}"/>
-                </a:ext>
-              </a:extLst>
-            </p:cNvPr>
-            <p:cNvPicPr>
-              <a:picLocks noChangeAspect="1"/>
-            </p:cNvPicPr>
-            <p:nvPr/>
-          </p:nvPicPr>
-          <p:blipFill>
-            <a:blip r:embed="rId4">
-              <a:extLst>
-                <a:ext uri="{28A0092B-C50C-407E-A947-70E740481C1C}">
-                  <a14:useLocalDpi xmlns:a14="http://schemas.microsoft.com/office/drawing/2010/main" val="0"/>
-                </a:ext>
-              </a:extLst>
-            </a:blip>
-            <a:stretch>
-              <a:fillRect/>
-            </a:stretch>
-          </p:blipFill>
-          <p:spPr>
-            <a:xfrm>
-              <a:off x="637062" y="2883582"/>
-              <a:ext cx="432000" cy="432000"/>
-            </a:xfrm>
-            <a:prstGeom prst="rect">
-              <a:avLst/>
-            </a:prstGeom>
-          </p:spPr>
-        </p:pic>
-      </p:grpSp>
-      <p:grpSp>
-        <p:nvGrpSpPr>
-          <p:cNvPr id="115" name="그룹 114">
-            <a:extLst>
-              <a:ext uri="{FF2B5EF4-FFF2-40B4-BE49-F238E27FC236}">
-                <a16:creationId xmlns:a16="http://schemas.microsoft.com/office/drawing/2014/main" id="{CD2C80D8-F77C-4E12-9C8C-B89D6324ED6E}"/>
-              </a:ext>
-            </a:extLst>
-          </p:cNvPr>
-          <p:cNvGrpSpPr/>
-          <p:nvPr/>
-        </p:nvGrpSpPr>
-        <p:grpSpPr>
-          <a:xfrm>
-            <a:off x="6470480" y="1811177"/>
-            <a:ext cx="658835" cy="658835"/>
-            <a:chOff x="523645" y="1618473"/>
-            <a:chExt cx="658835" cy="658835"/>
-          </a:xfrm>
-        </p:grpSpPr>
-        <p:sp>
-          <p:nvSpPr>
-            <p:cNvPr id="116" name="타원 115">
-              <a:extLst>
-                <a:ext uri="{FF2B5EF4-FFF2-40B4-BE49-F238E27FC236}">
-                  <a16:creationId xmlns:a16="http://schemas.microsoft.com/office/drawing/2014/main" id="{CDB7DC07-E3BA-4C09-BEFB-69504291DE6D}"/>
-                </a:ext>
-              </a:extLst>
-            </p:cNvPr>
-            <p:cNvSpPr/>
-            <p:nvPr/>
-          </p:nvSpPr>
-          <p:spPr>
-            <a:xfrm>
-              <a:off x="523645" y="1618473"/>
-              <a:ext cx="658835" cy="658835"/>
-            </a:xfrm>
-            <a:prstGeom prst="ellipse">
-              <a:avLst/>
-            </a:prstGeom>
-            <a:solidFill>
-              <a:schemeClr val="bg1"/>
-            </a:solidFill>
-            <a:ln w="9525">
-              <a:solidFill>
-                <a:schemeClr val="bg2">
-                  <a:lumMod val="90000"/>
-                </a:schemeClr>
-              </a:solidFill>
-            </a:ln>
-          </p:spPr>
-          <p:style>
-            <a:lnRef idx="2">
-              <a:schemeClr val="accent1">
-                <a:shade val="50000"/>
-              </a:schemeClr>
-            </a:lnRef>
-            <a:fillRef idx="1">
-              <a:schemeClr val="accent1"/>
-            </a:fillRef>
-            <a:effectRef idx="0">
-              <a:schemeClr val="accent1"/>
-            </a:effectRef>
-            <a:fontRef idx="minor">
-              <a:schemeClr val="lt1"/>
-            </a:fontRef>
-          </p:style>
-          <p:txBody>
-            <a:bodyPr rtlCol="0" anchor="ctr"/>
-            <a:lstStyle/>
-            <a:p>
-              <a:pPr algn="ctr"/>
-              <a:endParaRPr lang="ko-KR" altLang="en-US" b="1"/>
-            </a:p>
-          </p:txBody>
-        </p:sp>
-        <p:pic>
-          <p:nvPicPr>
-            <p:cNvPr id="117" name="그림 116">
-              <a:extLst>
-                <a:ext uri="{FF2B5EF4-FFF2-40B4-BE49-F238E27FC236}">
-                  <a16:creationId xmlns:a16="http://schemas.microsoft.com/office/drawing/2014/main" id="{E8FCEA6F-D3FB-4998-803B-1A089EA68661}"/>
-                </a:ext>
-              </a:extLst>
-            </p:cNvPr>
-            <p:cNvPicPr>
-              <a:picLocks noChangeAspect="1"/>
-            </p:cNvPicPr>
-            <p:nvPr/>
-          </p:nvPicPr>
-          <p:blipFill>
-            <a:blip r:embed="rId5">
-              <a:extLst>
-                <a:ext uri="{28A0092B-C50C-407E-A947-70E740481C1C}">
-                  <a14:useLocalDpi xmlns:a14="http://schemas.microsoft.com/office/drawing/2010/main" val="0"/>
-                </a:ext>
-              </a:extLst>
-            </a:blip>
-            <a:stretch>
-              <a:fillRect/>
-            </a:stretch>
-          </p:blipFill>
-          <p:spPr>
-            <a:xfrm>
-              <a:off x="637062" y="1731890"/>
-              <a:ext cx="432000" cy="432000"/>
-            </a:xfrm>
-            <a:prstGeom prst="rect">
-              <a:avLst/>
-            </a:prstGeom>
-          </p:spPr>
-        </p:pic>
-      </p:grpSp>
-      <p:grpSp>
-        <p:nvGrpSpPr>
-          <p:cNvPr id="123" name="그룹 122">
-            <a:extLst>
-              <a:ext uri="{FF2B5EF4-FFF2-40B4-BE49-F238E27FC236}">
-                <a16:creationId xmlns:a16="http://schemas.microsoft.com/office/drawing/2014/main" id="{BA32E08A-0D57-47B5-8E48-F94E67E5A22B}"/>
-              </a:ext>
-            </a:extLst>
-          </p:cNvPr>
-          <p:cNvGrpSpPr/>
-          <p:nvPr/>
-        </p:nvGrpSpPr>
-        <p:grpSpPr>
-          <a:xfrm>
-            <a:off x="289045" y="1811177"/>
-            <a:ext cx="658835" cy="658835"/>
-            <a:chOff x="289045" y="1811177"/>
-            <a:chExt cx="658835" cy="658835"/>
-          </a:xfrm>
-        </p:grpSpPr>
-        <p:sp>
-          <p:nvSpPr>
-            <p:cNvPr id="6" name="타원 5">
-              <a:extLst>
-                <a:ext uri="{FF2B5EF4-FFF2-40B4-BE49-F238E27FC236}">
-                  <a16:creationId xmlns:a16="http://schemas.microsoft.com/office/drawing/2014/main" id="{84D3C94D-F18D-43A8-90BD-93D37BFE9E2F}"/>
-                </a:ext>
-              </a:extLst>
-            </p:cNvPr>
-            <p:cNvSpPr/>
-            <p:nvPr/>
-          </p:nvSpPr>
-          <p:spPr>
-            <a:xfrm>
-              <a:off x="289045" y="1811177"/>
-              <a:ext cx="658835" cy="658835"/>
-            </a:xfrm>
-            <a:prstGeom prst="ellipse">
-              <a:avLst/>
-            </a:prstGeom>
-            <a:solidFill>
-              <a:schemeClr val="bg1"/>
-            </a:solidFill>
-            <a:ln w="9525">
-              <a:solidFill>
-                <a:schemeClr val="bg2">
-                  <a:lumMod val="90000"/>
-                </a:schemeClr>
-              </a:solidFill>
-            </a:ln>
-          </p:spPr>
-          <p:style>
-            <a:lnRef idx="2">
-              <a:schemeClr val="accent1">
-                <a:shade val="50000"/>
-              </a:schemeClr>
-            </a:lnRef>
-            <a:fillRef idx="1">
-              <a:schemeClr val="accent1"/>
-            </a:fillRef>
-            <a:effectRef idx="0">
-              <a:schemeClr val="accent1"/>
-            </a:effectRef>
-            <a:fontRef idx="minor">
-              <a:schemeClr val="lt1"/>
-            </a:fontRef>
-          </p:style>
-          <p:txBody>
-            <a:bodyPr rtlCol="0" anchor="ctr"/>
-            <a:lstStyle/>
-            <a:p>
-              <a:pPr algn="ctr"/>
-              <a:endParaRPr lang="ko-KR" altLang="en-US" b="1"/>
-            </a:p>
-          </p:txBody>
-        </p:sp>
-        <p:pic>
-          <p:nvPicPr>
-            <p:cNvPr id="122" name="그림 121">
-              <a:extLst>
-                <a:ext uri="{FF2B5EF4-FFF2-40B4-BE49-F238E27FC236}">
-                  <a16:creationId xmlns:a16="http://schemas.microsoft.com/office/drawing/2014/main" id="{0D18C965-DC4B-458A-892F-E0379A4BD68B}"/>
-                </a:ext>
-              </a:extLst>
-            </p:cNvPr>
-            <p:cNvPicPr>
-              <a:picLocks noChangeAspect="1"/>
-            </p:cNvPicPr>
-            <p:nvPr/>
-          </p:nvPicPr>
-          <p:blipFill>
-            <a:blip r:embed="rId6">
-              <a:extLst>
-                <a:ext uri="{28A0092B-C50C-407E-A947-70E740481C1C}">
-                  <a14:useLocalDpi xmlns:a14="http://schemas.microsoft.com/office/drawing/2010/main" val="0"/>
-                </a:ext>
-              </a:extLst>
-            </a:blip>
-            <a:stretch>
-              <a:fillRect/>
-            </a:stretch>
-          </p:blipFill>
-          <p:spPr>
-            <a:xfrm>
-              <a:off x="402462" y="1924594"/>
-              <a:ext cx="432000" cy="432000"/>
-            </a:xfrm>
-            <a:prstGeom prst="rect">
-              <a:avLst/>
-            </a:prstGeom>
-          </p:spPr>
-        </p:pic>
-      </p:grpSp>
-      <p:grpSp>
-        <p:nvGrpSpPr>
-          <p:cNvPr id="4" name="그룹 3">
-            <a:extLst>
-              <a:ext uri="{FF2B5EF4-FFF2-40B4-BE49-F238E27FC236}">
-                <a16:creationId xmlns:a16="http://schemas.microsoft.com/office/drawing/2014/main" id="{4BDC9FDA-3BA6-A256-403A-30D4E84DF781}"/>
-              </a:ext>
-            </a:extLst>
-          </p:cNvPr>
-          <p:cNvGrpSpPr/>
-          <p:nvPr/>
-        </p:nvGrpSpPr>
-        <p:grpSpPr>
-          <a:xfrm>
-            <a:off x="152400" y="5549551"/>
-            <a:ext cx="11873314" cy="1070854"/>
-            <a:chOff x="152400" y="5549551"/>
-            <a:chExt cx="11873314" cy="1070854"/>
-          </a:xfrm>
-        </p:grpSpPr>
-        <p:sp>
-          <p:nvSpPr>
-            <p:cNvPr id="124" name="사각형: 둥근 모서리 123">
-              <a:extLst>
-                <a:ext uri="{FF2B5EF4-FFF2-40B4-BE49-F238E27FC236}">
-                  <a16:creationId xmlns:a16="http://schemas.microsoft.com/office/drawing/2014/main" id="{0FE417CE-0DF4-49BF-8FD7-CA463F91BA6D}"/>
-                </a:ext>
-              </a:extLst>
-            </p:cNvPr>
-            <p:cNvSpPr/>
-            <p:nvPr/>
-          </p:nvSpPr>
-          <p:spPr>
-            <a:xfrm>
-              <a:off x="152400" y="5549551"/>
-              <a:ext cx="11873314" cy="1070854"/>
-            </a:xfrm>
-            <a:prstGeom prst="roundRect">
-              <a:avLst/>
-            </a:prstGeom>
-            <a:solidFill>
-              <a:schemeClr val="bg1">
-                <a:lumMod val="95000"/>
-              </a:schemeClr>
-            </a:solidFill>
-            <a:ln>
-              <a:solidFill>
-                <a:schemeClr val="bg2">
-                  <a:lumMod val="90000"/>
-                </a:schemeClr>
-              </a:solidFill>
-            </a:ln>
-          </p:spPr>
-          <p:style>
-            <a:lnRef idx="2">
-              <a:schemeClr val="accent1">
-                <a:shade val="15000"/>
-              </a:schemeClr>
-            </a:lnRef>
-            <a:fillRef idx="1">
-              <a:schemeClr val="accent1"/>
-            </a:fillRef>
-            <a:effectRef idx="0">
-              <a:schemeClr val="accent1"/>
-            </a:effectRef>
-            <a:fontRef idx="minor">
-              <a:schemeClr val="lt1"/>
-            </a:fontRef>
-          </p:style>
-          <p:txBody>
-            <a:bodyPr rtlCol="0" anchor="ctr"/>
-            <a:lstStyle/>
-            <a:p>
-              <a:pPr algn="ctr"/>
-              <a:endParaRPr lang="ko-KR" altLang="en-US" dirty="0"/>
-            </a:p>
-          </p:txBody>
-        </p:sp>
-        <p:sp>
-          <p:nvSpPr>
-            <p:cNvPr id="40" name="TextBox 39">
-              <a:extLst>
-                <a:ext uri="{FF2B5EF4-FFF2-40B4-BE49-F238E27FC236}">
-                  <a16:creationId xmlns:a16="http://schemas.microsoft.com/office/drawing/2014/main" id="{87181747-C65A-4E00-BE01-5F9FF020EAB8}"/>
-                </a:ext>
-              </a:extLst>
-            </p:cNvPr>
-            <p:cNvSpPr txBox="1"/>
-            <p:nvPr/>
-          </p:nvSpPr>
-          <p:spPr>
-            <a:xfrm>
-              <a:off x="1030654" y="5736264"/>
-              <a:ext cx="1109406" cy="253146"/>
-            </a:xfrm>
-            <a:prstGeom prst="rect">
-              <a:avLst/>
-            </a:prstGeom>
-            <a:noFill/>
-          </p:spPr>
-          <p:txBody>
-            <a:bodyPr wrap="none" lIns="0" tIns="0" rIns="0" bIns="0" rtlCol="0" anchor="t">
-              <a:spAutoFit/>
-            </a:bodyPr>
-            <a:lstStyle/>
-            <a:p>
-              <a:pPr>
-                <a:lnSpc>
-                  <a:spcPct val="130000"/>
-                </a:lnSpc>
-              </a:pPr>
-              <a:r>
-                <a:rPr lang="en-US" altLang="ko-KR" sz="1400" dirty="0">
-                  <a:solidFill>
-                    <a:schemeClr val="tx1">
-                      <a:lumMod val="50000"/>
-                      <a:lumOff val="50000"/>
-                    </a:schemeClr>
-                  </a:solidFill>
-                  <a:latin typeface="a시월구일3" panose="02020600000000000000" pitchFamily="18" charset="-127"/>
-                  <a:ea typeface="a시월구일3" panose="02020600000000000000" pitchFamily="18" charset="-127"/>
-                  <a:cs typeface="+mj-cs"/>
-                </a:rPr>
-                <a:t>TECH STACK</a:t>
-              </a:r>
-            </a:p>
-          </p:txBody>
-        </p:sp>
-        <p:sp>
-          <p:nvSpPr>
-            <p:cNvPr id="41" name="TextBox 40">
-              <a:extLst>
-                <a:ext uri="{FF2B5EF4-FFF2-40B4-BE49-F238E27FC236}">
-                  <a16:creationId xmlns:a16="http://schemas.microsoft.com/office/drawing/2014/main" id="{D10AD703-93EA-4CA2-9821-5EFC00794A62}"/>
-                </a:ext>
-              </a:extLst>
-            </p:cNvPr>
-            <p:cNvSpPr txBox="1"/>
-            <p:nvPr/>
-          </p:nvSpPr>
-          <p:spPr>
-            <a:xfrm>
-              <a:off x="1152546" y="6083118"/>
-              <a:ext cx="865622" cy="289310"/>
-            </a:xfrm>
-            <a:prstGeom prst="rect">
-              <a:avLst/>
-            </a:prstGeom>
-            <a:noFill/>
-          </p:spPr>
-          <p:txBody>
-            <a:bodyPr wrap="none" lIns="0" tIns="0" rIns="0" bIns="0" rtlCol="0" anchor="t">
-              <a:spAutoFit/>
-            </a:bodyPr>
-            <a:lstStyle/>
-            <a:p>
-              <a:pPr>
-                <a:lnSpc>
-                  <a:spcPct val="130000"/>
-                </a:lnSpc>
-              </a:pPr>
-              <a:r>
-                <a:rPr lang="ko-KR" altLang="en-US" sz="1600" dirty="0">
-                  <a:latin typeface="a시월구일2" panose="02020600000000000000" pitchFamily="18" charset="-127"/>
-                  <a:ea typeface="a시월구일2" panose="02020600000000000000" pitchFamily="18" charset="-127"/>
-                  <a:cs typeface="+mj-cs"/>
-                </a:rPr>
-                <a:t>사용 기술</a:t>
-              </a:r>
-              <a:endParaRPr lang="en-US" altLang="ko-KR" sz="1600" dirty="0">
-                <a:latin typeface="a시월구일2" panose="02020600000000000000" pitchFamily="18" charset="-127"/>
-                <a:ea typeface="a시월구일2" panose="02020600000000000000" pitchFamily="18" charset="-127"/>
-                <a:cs typeface="+mj-cs"/>
-              </a:endParaRPr>
-            </a:p>
-          </p:txBody>
-        </p:sp>
-        <p:sp>
-          <p:nvSpPr>
-            <p:cNvPr id="10" name="사각형: 둥근 모서리 9">
-              <a:extLst>
-                <a:ext uri="{FF2B5EF4-FFF2-40B4-BE49-F238E27FC236}">
-                  <a16:creationId xmlns:a16="http://schemas.microsoft.com/office/drawing/2014/main" id="{39993772-4129-42E9-8836-F92DD479718C}"/>
-                </a:ext>
-              </a:extLst>
-            </p:cNvPr>
-            <p:cNvSpPr/>
-            <p:nvPr/>
-          </p:nvSpPr>
-          <p:spPr>
-            <a:xfrm>
-              <a:off x="2390391" y="5722462"/>
-              <a:ext cx="1690471" cy="289310"/>
-            </a:xfrm>
-            <a:prstGeom prst="roundRect">
-              <a:avLst>
-                <a:gd name="adj" fmla="val 50000"/>
-              </a:avLst>
-            </a:prstGeom>
-            <a:solidFill>
-              <a:schemeClr val="bg1"/>
-            </a:solidFill>
-            <a:ln>
-              <a:solidFill>
-                <a:schemeClr val="bg2">
-                  <a:lumMod val="90000"/>
-                </a:schemeClr>
-              </a:solidFill>
-            </a:ln>
-          </p:spPr>
-          <p:style>
-            <a:lnRef idx="2">
-              <a:schemeClr val="accent1">
-                <a:shade val="50000"/>
-              </a:schemeClr>
-            </a:lnRef>
-            <a:fillRef idx="1">
-              <a:schemeClr val="accent1"/>
-            </a:fillRef>
-            <a:effectRef idx="0">
-              <a:schemeClr val="accent1"/>
-            </a:effectRef>
-            <a:fontRef idx="minor">
-              <a:schemeClr val="lt1"/>
-            </a:fontRef>
-          </p:style>
-          <p:txBody>
-            <a:bodyPr rtlCol="0" anchor="ctr"/>
-            <a:lstStyle/>
-            <a:p>
-              <a:pPr algn="ctr"/>
-              <a:r>
-                <a:rPr lang="en-US" altLang="ko-KR" sz="1400" dirty="0">
-                  <a:solidFill>
-                    <a:schemeClr val="tx1"/>
-                  </a:solidFill>
-                  <a:latin typeface="a시월구일1" panose="02020600000000000000" pitchFamily="18" charset="-127"/>
-                  <a:ea typeface="a시월구일1" panose="02020600000000000000" pitchFamily="18" charset="-127"/>
-                </a:rPr>
-                <a:t>Python</a:t>
-              </a:r>
-              <a:endParaRPr lang="ko-KR" altLang="en-US" sz="1400" dirty="0">
-                <a:solidFill>
-                  <a:schemeClr val="tx1"/>
-                </a:solidFill>
-                <a:latin typeface="a시월구일1" panose="02020600000000000000" pitchFamily="18" charset="-127"/>
-                <a:ea typeface="a시월구일1" panose="02020600000000000000" pitchFamily="18" charset="-127"/>
-              </a:endParaRPr>
-            </a:p>
-          </p:txBody>
-        </p:sp>
-        <p:sp>
-          <p:nvSpPr>
-            <p:cNvPr id="43" name="사각형: 둥근 모서리 42">
-              <a:extLst>
-                <a:ext uri="{FF2B5EF4-FFF2-40B4-BE49-F238E27FC236}">
-                  <a16:creationId xmlns:a16="http://schemas.microsoft.com/office/drawing/2014/main" id="{EE70C9D4-10E6-4911-B25B-D1D2F767C5B6}"/>
-                </a:ext>
-              </a:extLst>
-            </p:cNvPr>
-            <p:cNvSpPr/>
-            <p:nvPr/>
-          </p:nvSpPr>
-          <p:spPr>
-            <a:xfrm>
-              <a:off x="4295609" y="5722462"/>
-              <a:ext cx="1690471" cy="289310"/>
-            </a:xfrm>
-            <a:prstGeom prst="roundRect">
-              <a:avLst>
-                <a:gd name="adj" fmla="val 50000"/>
-              </a:avLst>
-            </a:prstGeom>
-            <a:solidFill>
-              <a:schemeClr val="bg1"/>
-            </a:solidFill>
-            <a:ln>
-              <a:solidFill>
-                <a:schemeClr val="bg2">
-                  <a:lumMod val="90000"/>
-                </a:schemeClr>
-              </a:solidFill>
-            </a:ln>
-          </p:spPr>
-          <p:style>
-            <a:lnRef idx="2">
-              <a:schemeClr val="accent1">
-                <a:shade val="50000"/>
-              </a:schemeClr>
-            </a:lnRef>
-            <a:fillRef idx="1">
-              <a:schemeClr val="accent1"/>
-            </a:fillRef>
-            <a:effectRef idx="0">
-              <a:schemeClr val="accent1"/>
-            </a:effectRef>
-            <a:fontRef idx="minor">
-              <a:schemeClr val="lt1"/>
-            </a:fontRef>
-          </p:style>
-          <p:txBody>
-            <a:bodyPr rtlCol="0" anchor="ctr"/>
-            <a:lstStyle/>
-            <a:p>
-              <a:pPr algn="ctr"/>
-              <a:r>
-                <a:rPr lang="en-US" altLang="ko-KR" sz="1400" dirty="0">
-                  <a:solidFill>
-                    <a:schemeClr val="tx1"/>
-                  </a:solidFill>
-                  <a:latin typeface="a시월구일1" panose="02020600000000000000" pitchFamily="18" charset="-127"/>
-                  <a:ea typeface="a시월구일1" panose="02020600000000000000" pitchFamily="18" charset="-127"/>
-                </a:rPr>
-                <a:t>Pandas</a:t>
-              </a:r>
-              <a:endParaRPr lang="ko-KR" altLang="en-US" sz="1400" dirty="0">
-                <a:solidFill>
-                  <a:schemeClr val="tx1"/>
-                </a:solidFill>
-                <a:latin typeface="a시월구일1" panose="02020600000000000000" pitchFamily="18" charset="-127"/>
-                <a:ea typeface="a시월구일1" panose="02020600000000000000" pitchFamily="18" charset="-127"/>
-              </a:endParaRPr>
-            </a:p>
-          </p:txBody>
-        </p:sp>
-        <p:sp>
-          <p:nvSpPr>
-            <p:cNvPr id="44" name="사각형: 둥근 모서리 43">
-              <a:extLst>
-                <a:ext uri="{FF2B5EF4-FFF2-40B4-BE49-F238E27FC236}">
-                  <a16:creationId xmlns:a16="http://schemas.microsoft.com/office/drawing/2014/main" id="{63922D9B-A9B2-4C66-A584-53E3FCA324B9}"/>
-                </a:ext>
-              </a:extLst>
-            </p:cNvPr>
-            <p:cNvSpPr/>
-            <p:nvPr/>
-          </p:nvSpPr>
-          <p:spPr>
-            <a:xfrm>
-              <a:off x="8106045" y="5719046"/>
-              <a:ext cx="1691623" cy="289310"/>
-            </a:xfrm>
-            <a:prstGeom prst="roundRect">
-              <a:avLst>
-                <a:gd name="adj" fmla="val 50000"/>
-              </a:avLst>
-            </a:prstGeom>
-            <a:solidFill>
-              <a:schemeClr val="bg1"/>
-            </a:solidFill>
-            <a:ln>
-              <a:solidFill>
-                <a:schemeClr val="bg2">
-                  <a:lumMod val="90000"/>
-                </a:schemeClr>
-              </a:solidFill>
-            </a:ln>
-          </p:spPr>
-          <p:style>
-            <a:lnRef idx="2">
-              <a:schemeClr val="accent1">
-                <a:shade val="50000"/>
-              </a:schemeClr>
-            </a:lnRef>
-            <a:fillRef idx="1">
-              <a:schemeClr val="accent1"/>
-            </a:fillRef>
-            <a:effectRef idx="0">
-              <a:schemeClr val="accent1"/>
-            </a:effectRef>
-            <a:fontRef idx="minor">
-              <a:schemeClr val="lt1"/>
-            </a:fontRef>
-          </p:style>
-          <p:txBody>
-            <a:bodyPr rtlCol="0" anchor="ctr"/>
-            <a:lstStyle/>
-            <a:p>
-              <a:pPr algn="ctr"/>
-              <a:r>
-                <a:rPr lang="en-US" altLang="ko-KR" sz="1400" dirty="0">
-                  <a:solidFill>
-                    <a:schemeClr val="tx1"/>
-                  </a:solidFill>
-                  <a:latin typeface="a시월구일1" panose="02020600000000000000" pitchFamily="18" charset="-127"/>
-                  <a:ea typeface="a시월구일1" panose="02020600000000000000" pitchFamily="18" charset="-127"/>
-                </a:rPr>
-                <a:t>Matplotlib</a:t>
-              </a:r>
-              <a:endParaRPr lang="ko-KR" altLang="en-US" sz="1400" dirty="0">
-                <a:solidFill>
-                  <a:schemeClr val="tx1"/>
-                </a:solidFill>
-                <a:latin typeface="a시월구일1" panose="02020600000000000000" pitchFamily="18" charset="-127"/>
-                <a:ea typeface="a시월구일1" panose="02020600000000000000" pitchFamily="18" charset="-127"/>
-              </a:endParaRPr>
-            </a:p>
-          </p:txBody>
-        </p:sp>
-        <p:sp>
-          <p:nvSpPr>
-            <p:cNvPr id="45" name="사각형: 둥근 모서리 44">
-              <a:extLst>
-                <a:ext uri="{FF2B5EF4-FFF2-40B4-BE49-F238E27FC236}">
-                  <a16:creationId xmlns:a16="http://schemas.microsoft.com/office/drawing/2014/main" id="{C83C83F7-956D-445B-BBEB-488784A38169}"/>
-                </a:ext>
-              </a:extLst>
-            </p:cNvPr>
-            <p:cNvSpPr/>
-            <p:nvPr/>
-          </p:nvSpPr>
-          <p:spPr>
-            <a:xfrm>
-              <a:off x="2390391" y="6068358"/>
-              <a:ext cx="1690471" cy="289310"/>
-            </a:xfrm>
-            <a:prstGeom prst="roundRect">
-              <a:avLst>
-                <a:gd name="adj" fmla="val 50000"/>
-              </a:avLst>
-            </a:prstGeom>
-            <a:solidFill>
-              <a:schemeClr val="bg1"/>
-            </a:solidFill>
-            <a:ln>
-              <a:solidFill>
-                <a:schemeClr val="bg2">
-                  <a:lumMod val="90000"/>
-                </a:schemeClr>
-              </a:solidFill>
-            </a:ln>
-          </p:spPr>
-          <p:style>
-            <a:lnRef idx="2">
-              <a:schemeClr val="accent1">
-                <a:shade val="50000"/>
-              </a:schemeClr>
-            </a:lnRef>
-            <a:fillRef idx="1">
-              <a:schemeClr val="accent1"/>
-            </a:fillRef>
-            <a:effectRef idx="0">
-              <a:schemeClr val="accent1"/>
-            </a:effectRef>
-            <a:fontRef idx="minor">
-              <a:schemeClr val="lt1"/>
-            </a:fontRef>
-          </p:style>
-          <p:txBody>
-            <a:bodyPr rtlCol="0" anchor="ctr"/>
-            <a:lstStyle/>
-            <a:p>
-              <a:pPr algn="ctr"/>
-              <a:r>
-                <a:rPr lang="en-US" altLang="ko-KR" sz="1400" dirty="0">
-                  <a:solidFill>
-                    <a:schemeClr val="tx1"/>
-                  </a:solidFill>
-                  <a:latin typeface="a시월구일1" panose="02020600000000000000" pitchFamily="18" charset="-127"/>
-                  <a:ea typeface="a시월구일1" panose="02020600000000000000" pitchFamily="18" charset="-127"/>
-                </a:rPr>
-                <a:t>Flask</a:t>
-              </a:r>
-              <a:endParaRPr lang="ko-KR" altLang="en-US" sz="1400" dirty="0">
-                <a:solidFill>
-                  <a:schemeClr val="tx1"/>
-                </a:solidFill>
-                <a:latin typeface="a시월구일1" panose="02020600000000000000" pitchFamily="18" charset="-127"/>
-                <a:ea typeface="a시월구일1" panose="02020600000000000000" pitchFamily="18" charset="-127"/>
-              </a:endParaRPr>
-            </a:p>
-          </p:txBody>
-        </p:sp>
-        <p:grpSp>
-          <p:nvGrpSpPr>
-            <p:cNvPr id="53" name="그룹 52">
-              <a:extLst>
-                <a:ext uri="{FF2B5EF4-FFF2-40B4-BE49-F238E27FC236}">
-                  <a16:creationId xmlns:a16="http://schemas.microsoft.com/office/drawing/2014/main" id="{E33814CE-89E0-48E1-B2BC-4E820B2AD9F1}"/>
-                </a:ext>
-              </a:extLst>
-            </p:cNvPr>
-            <p:cNvGrpSpPr/>
-            <p:nvPr/>
-          </p:nvGrpSpPr>
-          <p:grpSpPr>
-            <a:xfrm>
-              <a:off x="289045" y="5753700"/>
-              <a:ext cx="658835" cy="658835"/>
-              <a:chOff x="523645" y="5131975"/>
-              <a:chExt cx="658835" cy="658835"/>
-            </a:xfrm>
-          </p:grpSpPr>
-          <p:sp>
-            <p:nvSpPr>
-              <p:cNvPr id="39" name="타원 38">
-                <a:extLst>
-                  <a:ext uri="{FF2B5EF4-FFF2-40B4-BE49-F238E27FC236}">
-                    <a16:creationId xmlns:a16="http://schemas.microsoft.com/office/drawing/2014/main" id="{A3A3257E-8315-4C68-8853-54BD3EC4EBF8}"/>
-                  </a:ext>
-                </a:extLst>
-              </p:cNvPr>
-              <p:cNvSpPr/>
-              <p:nvPr/>
-            </p:nvSpPr>
-            <p:spPr>
-              <a:xfrm>
-                <a:off x="523645" y="5131975"/>
-                <a:ext cx="658835" cy="658835"/>
-              </a:xfrm>
-              <a:prstGeom prst="ellipse">
-                <a:avLst/>
-              </a:prstGeom>
-              <a:solidFill>
-                <a:schemeClr val="bg1"/>
-              </a:solidFill>
-              <a:ln w="9525">
-                <a:solidFill>
-                  <a:schemeClr val="bg2">
-                    <a:lumMod val="90000"/>
-                  </a:schemeClr>
-                </a:solidFill>
-              </a:ln>
-            </p:spPr>
-            <p:style>
-              <a:lnRef idx="2">
-                <a:schemeClr val="accent1">
-                  <a:shade val="50000"/>
-                </a:schemeClr>
-              </a:lnRef>
-              <a:fillRef idx="1">
-                <a:schemeClr val="accent1"/>
-              </a:fillRef>
-              <a:effectRef idx="0">
-                <a:schemeClr val="accent1"/>
-              </a:effectRef>
-              <a:fontRef idx="minor">
-                <a:schemeClr val="lt1"/>
-              </a:fontRef>
-            </p:style>
-            <p:txBody>
-              <a:bodyPr rtlCol="0" anchor="ctr"/>
-              <a:lstStyle/>
-              <a:p>
-                <a:pPr algn="ctr"/>
-                <a:endParaRPr lang="ko-KR" altLang="en-US"/>
-              </a:p>
-            </p:txBody>
-          </p:sp>
-          <p:pic>
-            <p:nvPicPr>
-              <p:cNvPr id="49" name="그림 48">
-                <a:extLst>
-                  <a:ext uri="{FF2B5EF4-FFF2-40B4-BE49-F238E27FC236}">
-                    <a16:creationId xmlns:a16="http://schemas.microsoft.com/office/drawing/2014/main" id="{4F7A112A-BDFA-4024-AA73-E70990EA5383}"/>
-                  </a:ext>
-                </a:extLst>
-              </p:cNvPr>
-              <p:cNvPicPr>
-                <a:picLocks noChangeAspect="1"/>
-              </p:cNvPicPr>
-              <p:nvPr/>
-            </p:nvPicPr>
-            <p:blipFill>
-              <a:blip r:embed="rId7">
-                <a:extLst>
-                  <a:ext uri="{28A0092B-C50C-407E-A947-70E740481C1C}">
-                    <a14:useLocalDpi xmlns:a14="http://schemas.microsoft.com/office/drawing/2010/main" val="0"/>
-                  </a:ext>
-                </a:extLst>
-              </a:blip>
-              <a:stretch>
-                <a:fillRect/>
-              </a:stretch>
-            </p:blipFill>
-            <p:spPr>
-              <a:xfrm>
-                <a:off x="637062" y="5245392"/>
-                <a:ext cx="432000" cy="432000"/>
-              </a:xfrm>
-              <a:prstGeom prst="rect">
-                <a:avLst/>
-              </a:prstGeom>
-            </p:spPr>
-          </p:pic>
-        </p:grpSp>
-        <p:sp>
-          <p:nvSpPr>
-            <p:cNvPr id="120" name="사각형: 둥근 모서리 119">
-              <a:extLst>
-                <a:ext uri="{FF2B5EF4-FFF2-40B4-BE49-F238E27FC236}">
-                  <a16:creationId xmlns:a16="http://schemas.microsoft.com/office/drawing/2014/main" id="{D6B4135B-E6BA-4AB9-A6C1-72535B27DF45}"/>
-                </a:ext>
-              </a:extLst>
-            </p:cNvPr>
-            <p:cNvSpPr/>
-            <p:nvPr/>
-          </p:nvSpPr>
-          <p:spPr>
-            <a:xfrm>
-              <a:off x="6200827" y="5719046"/>
-              <a:ext cx="1690471" cy="289310"/>
-            </a:xfrm>
-            <a:prstGeom prst="roundRect">
-              <a:avLst>
-                <a:gd name="adj" fmla="val 50000"/>
-              </a:avLst>
-            </a:prstGeom>
-            <a:solidFill>
-              <a:schemeClr val="bg1"/>
-            </a:solidFill>
-            <a:ln>
-              <a:solidFill>
-                <a:schemeClr val="bg2">
-                  <a:lumMod val="90000"/>
-                </a:schemeClr>
-              </a:solidFill>
-            </a:ln>
-          </p:spPr>
-          <p:style>
-            <a:lnRef idx="2">
-              <a:schemeClr val="accent1">
-                <a:shade val="50000"/>
-              </a:schemeClr>
-            </a:lnRef>
-            <a:fillRef idx="1">
-              <a:schemeClr val="accent1"/>
-            </a:fillRef>
-            <a:effectRef idx="0">
-              <a:schemeClr val="accent1"/>
-            </a:effectRef>
-            <a:fontRef idx="minor">
-              <a:schemeClr val="lt1"/>
-            </a:fontRef>
-          </p:style>
-          <p:txBody>
-            <a:bodyPr rtlCol="0" anchor="ctr"/>
-            <a:lstStyle/>
-            <a:p>
-              <a:pPr algn="ctr"/>
-              <a:r>
-                <a:rPr lang="en-US" altLang="ko-KR" sz="1400" dirty="0">
-                  <a:solidFill>
-                    <a:schemeClr val="tx1"/>
-                  </a:solidFill>
-                  <a:latin typeface="a시월구일1" panose="02020600000000000000" pitchFamily="18" charset="-127"/>
-                  <a:ea typeface="a시월구일1" panose="02020600000000000000" pitchFamily="18" charset="-127"/>
-                </a:rPr>
-                <a:t>Scikit-learn</a:t>
-              </a:r>
-              <a:endParaRPr lang="ko-KR" altLang="en-US" sz="1400" dirty="0">
-                <a:solidFill>
-                  <a:schemeClr val="tx1"/>
-                </a:solidFill>
-                <a:latin typeface="a시월구일1" panose="02020600000000000000" pitchFamily="18" charset="-127"/>
-                <a:ea typeface="a시월구일1" panose="02020600000000000000" pitchFamily="18" charset="-127"/>
-              </a:endParaRPr>
-            </a:p>
-          </p:txBody>
-        </p:sp>
-        <p:sp>
-          <p:nvSpPr>
-            <p:cNvPr id="2" name="사각형: 둥근 모서리 1">
-              <a:extLst>
-                <a:ext uri="{FF2B5EF4-FFF2-40B4-BE49-F238E27FC236}">
-                  <a16:creationId xmlns:a16="http://schemas.microsoft.com/office/drawing/2014/main" id="{067EC97C-39B3-6B0A-0351-3745E6034C20}"/>
-                </a:ext>
-              </a:extLst>
-            </p:cNvPr>
-            <p:cNvSpPr/>
-            <p:nvPr/>
-          </p:nvSpPr>
-          <p:spPr>
-            <a:xfrm>
-              <a:off x="4295609" y="6083118"/>
-              <a:ext cx="1690471" cy="289310"/>
-            </a:xfrm>
-            <a:prstGeom prst="roundRect">
-              <a:avLst>
-                <a:gd name="adj" fmla="val 50000"/>
-              </a:avLst>
-            </a:prstGeom>
-            <a:solidFill>
-              <a:schemeClr val="bg1"/>
-            </a:solidFill>
-            <a:ln>
-              <a:solidFill>
-                <a:schemeClr val="bg2">
-                  <a:lumMod val="90000"/>
-                </a:schemeClr>
-              </a:solidFill>
-            </a:ln>
-          </p:spPr>
-          <p:style>
-            <a:lnRef idx="2">
-              <a:schemeClr val="accent1">
-                <a:shade val="50000"/>
-              </a:schemeClr>
-            </a:lnRef>
-            <a:fillRef idx="1">
-              <a:schemeClr val="accent1"/>
-            </a:fillRef>
-            <a:effectRef idx="0">
-              <a:schemeClr val="accent1"/>
-            </a:effectRef>
-            <a:fontRef idx="minor">
-              <a:schemeClr val="lt1"/>
-            </a:fontRef>
-          </p:style>
-          <p:txBody>
-            <a:bodyPr rtlCol="0" anchor="ctr"/>
-            <a:lstStyle/>
-            <a:p>
-              <a:pPr algn="ctr"/>
-              <a:r>
-                <a:rPr lang="en-US" altLang="ko-KR" sz="1400" dirty="0">
-                  <a:solidFill>
-                    <a:schemeClr val="tx1"/>
-                  </a:solidFill>
-                  <a:latin typeface="a시월구일1" panose="02020600000000000000" pitchFamily="18" charset="-127"/>
-                  <a:ea typeface="a시월구일1" panose="02020600000000000000" pitchFamily="18" charset="-127"/>
-                </a:rPr>
-                <a:t>Bootstrap</a:t>
-              </a:r>
-              <a:endParaRPr lang="ko-KR" altLang="en-US" sz="1400" dirty="0">
-                <a:solidFill>
-                  <a:schemeClr val="tx1"/>
-                </a:solidFill>
-                <a:latin typeface="a시월구일1" panose="02020600000000000000" pitchFamily="18" charset="-127"/>
-                <a:ea typeface="a시월구일1" panose="02020600000000000000" pitchFamily="18" charset="-127"/>
-              </a:endParaRPr>
-            </a:p>
-          </p:txBody>
-        </p:sp>
-        <p:sp>
-          <p:nvSpPr>
-            <p:cNvPr id="3" name="사각형: 둥근 모서리 2">
-              <a:extLst>
-                <a:ext uri="{FF2B5EF4-FFF2-40B4-BE49-F238E27FC236}">
-                  <a16:creationId xmlns:a16="http://schemas.microsoft.com/office/drawing/2014/main" id="{665CF7E1-9057-EE31-F2C2-50307CDB1F73}"/>
-                </a:ext>
-              </a:extLst>
-            </p:cNvPr>
-            <p:cNvSpPr/>
-            <p:nvPr/>
-          </p:nvSpPr>
-          <p:spPr>
-            <a:xfrm>
-              <a:off x="10012415" y="5719046"/>
-              <a:ext cx="1691623" cy="289310"/>
-            </a:xfrm>
-            <a:prstGeom prst="roundRect">
-              <a:avLst>
-                <a:gd name="adj" fmla="val 50000"/>
-              </a:avLst>
-            </a:prstGeom>
-            <a:solidFill>
-              <a:schemeClr val="bg1"/>
-            </a:solidFill>
-            <a:ln>
-              <a:solidFill>
-                <a:schemeClr val="bg2">
-                  <a:lumMod val="90000"/>
-                </a:schemeClr>
-              </a:solidFill>
-            </a:ln>
-          </p:spPr>
-          <p:style>
-            <a:lnRef idx="2">
-              <a:schemeClr val="accent1">
-                <a:shade val="50000"/>
-              </a:schemeClr>
-            </a:lnRef>
-            <a:fillRef idx="1">
-              <a:schemeClr val="accent1"/>
-            </a:fillRef>
-            <a:effectRef idx="0">
-              <a:schemeClr val="accent1"/>
-            </a:effectRef>
-            <a:fontRef idx="minor">
-              <a:schemeClr val="lt1"/>
-            </a:fontRef>
-          </p:style>
-          <p:txBody>
-            <a:bodyPr rtlCol="0" anchor="ctr"/>
-            <a:lstStyle/>
-            <a:p>
-              <a:pPr algn="ctr"/>
-              <a:r>
-                <a:rPr lang="en-US" altLang="ko-KR" sz="1400" dirty="0">
-                  <a:solidFill>
-                    <a:schemeClr val="tx1"/>
-                  </a:solidFill>
-                  <a:latin typeface="a시월구일1" panose="02020600000000000000" pitchFamily="18" charset="-127"/>
-                  <a:ea typeface="a시월구일1" panose="02020600000000000000" pitchFamily="18" charset="-127"/>
-                </a:rPr>
-                <a:t>SHAP</a:t>
-              </a:r>
-              <a:endParaRPr lang="ko-KR" altLang="en-US" sz="1400" dirty="0">
-                <a:solidFill>
-                  <a:schemeClr val="tx1"/>
-                </a:solidFill>
-                <a:latin typeface="a시월구일1" panose="02020600000000000000" pitchFamily="18" charset="-127"/>
-                <a:ea typeface="a시월구일1" panose="02020600000000000000" pitchFamily="18" charset="-127"/>
-              </a:endParaRPr>
-            </a:p>
-          </p:txBody>
-        </p:sp>
-      </p:grpSp>
-    </p:spTree>
-    <p:extLst>
-      <p:ext uri="{BB962C8B-B14F-4D97-AF65-F5344CB8AC3E}">
-        <p14:creationId xmlns:p14="http://schemas.microsoft.com/office/powerpoint/2010/main" val="368021184"/>
-      </p:ext>
-    </p:extLst>
-  </p:cSld>
-  <p:clrMapOvr>
-    <a:masterClrMapping/>
-  </p:clrMapOvr>
-</p:sld>
-</file>
-
-<file path=ppt/slides/slide3.xml><?xml version="1.0" encoding="utf-8"?>
 <p:sld xmlns:a="http://schemas.openxmlformats.org/drawingml/2006/main" xmlns:r="http://schemas.openxmlformats.org/officeDocument/2006/relationships" xmlns:p="http://schemas.openxmlformats.org/presentationml/2006/main">
   <p:cSld>
     <p:spTree>
@@ -6699,7 +4082,7 @@
 </p:sld>
 </file>
 
-<file path=ppt/slides/slide4.xml><?xml version="1.0" encoding="utf-8"?>
+<file path=ppt/slides/slide3.xml><?xml version="1.0" encoding="utf-8"?>
 <p:sld xmlns:a="http://schemas.openxmlformats.org/drawingml/2006/main" xmlns:r="http://schemas.openxmlformats.org/officeDocument/2006/relationships" xmlns:p="http://schemas.openxmlformats.org/presentationml/2006/main">
   <p:cSld>
     <p:spTree>
@@ -7840,7 +5223,7 @@
 </p:sld>
 </file>
 
-<file path=ppt/slides/slide5.xml><?xml version="1.0" encoding="utf-8"?>
+<file path=ppt/slides/slide4.xml><?xml version="1.0" encoding="utf-8"?>
 <p:sld xmlns:a="http://schemas.openxmlformats.org/drawingml/2006/main" xmlns:r="http://schemas.openxmlformats.org/officeDocument/2006/relationships" xmlns:p="http://schemas.openxmlformats.org/presentationml/2006/main">
   <p:cSld>
     <p:spTree>
@@ -9277,7 +6660,7 @@
 </p:sld>
 </file>
 
-<file path=ppt/slides/slide6.xml><?xml version="1.0" encoding="utf-8"?>
+<file path=ppt/slides/slide5.xml><?xml version="1.0" encoding="utf-8"?>
 <p:sld xmlns:a="http://schemas.openxmlformats.org/drawingml/2006/main" xmlns:r="http://schemas.openxmlformats.org/officeDocument/2006/relationships" xmlns:p="http://schemas.openxmlformats.org/presentationml/2006/main">
   <p:cSld>
     <p:spTree>
@@ -12914,7 +10297,7 @@
 </p:sld>
 </file>
 
-<file path=ppt/slides/slide7.xml><?xml version="1.0" encoding="utf-8"?>
+<file path=ppt/slides/slide6.xml><?xml version="1.0" encoding="utf-8"?>
 <p:sld xmlns:a="http://schemas.openxmlformats.org/drawingml/2006/main" xmlns:r="http://schemas.openxmlformats.org/officeDocument/2006/relationships" xmlns:p="http://schemas.openxmlformats.org/presentationml/2006/main">
   <p:cSld>
     <p:spTree>
@@ -16205,7 +13588,7 @@
 </p:sld>
 </file>
 
-<file path=ppt/slides/slide8.xml><?xml version="1.0" encoding="utf-8"?>
+<file path=ppt/slides/slide7.xml><?xml version="1.0" encoding="utf-8"?>
 <p:sld xmlns:a="http://schemas.openxmlformats.org/drawingml/2006/main" xmlns:r="http://schemas.openxmlformats.org/officeDocument/2006/relationships" xmlns:p="http://schemas.openxmlformats.org/presentationml/2006/main" show="0">
   <p:cSld>
     <p:spTree>

--- a/1차 프로젝트/1. 기획서_V2.pptx
+++ b/1차 프로젝트/1. 기획서_V2.pptx
@@ -135,13 +135,89 @@
 <pc:chgInfo xmlns:a="http://schemas.openxmlformats.org/drawingml/2006/main" xmlns:r="http://schemas.openxmlformats.org/officeDocument/2006/relationships" xmlns:ac="http://schemas.microsoft.com/office/drawing/2013/main/command" xmlns:pc="http://schemas.microsoft.com/office/powerpoint/2013/main/command">
   <pc:docChgLst>
     <pc:chgData name="성욱 진" userId="f47a80d7871cb125" providerId="LiveId" clId="{FDCBA572-350E-4C39-BF59-3626AC33FF79}"/>
-    <pc:docChg chg="modSld">
-      <pc:chgData name="성욱 진" userId="f47a80d7871cb125" providerId="LiveId" clId="{FDCBA572-350E-4C39-BF59-3626AC33FF79}" dt="2026-03-19T05:45:37.039" v="0" actId="729"/>
+    <pc:docChg chg="custSel delSld modSld">
+      <pc:chgData name="성욱 진" userId="f47a80d7871cb125" providerId="LiveId" clId="{FDCBA572-350E-4C39-BF59-3626AC33FF79}" dt="2026-03-19T05:56:01.480" v="7" actId="47"/>
       <pc:docMkLst>
         <pc:docMk/>
       </pc:docMkLst>
-      <pc:sldChg chg="mod modShow">
-        <pc:chgData name="성욱 진" userId="f47a80d7871cb125" providerId="LiveId" clId="{FDCBA572-350E-4C39-BF59-3626AC33FF79}" dt="2026-03-19T05:45:37.039" v="0" actId="729"/>
+      <pc:sldChg chg="delSp modSp mod">
+        <pc:chgData name="성욱 진" userId="f47a80d7871cb125" providerId="LiveId" clId="{FDCBA572-350E-4C39-BF59-3626AC33FF79}" dt="2026-03-19T05:51:26.562" v="5" actId="478"/>
+        <pc:sldMkLst>
+          <pc:docMk/>
+          <pc:sldMk cId="687017097" sldId="256"/>
+        </pc:sldMkLst>
+        <pc:spChg chg="del mod">
+          <ac:chgData name="성욱 진" userId="f47a80d7871cb125" providerId="LiveId" clId="{FDCBA572-350E-4C39-BF59-3626AC33FF79}" dt="2026-03-19T05:50:44.358" v="2" actId="478"/>
+          <ac:spMkLst>
+            <pc:docMk/>
+            <pc:sldMk cId="687017097" sldId="256"/>
+            <ac:spMk id="8" creationId="{2C2E5547-8B93-4929-A4AD-0D273BF17DC5}"/>
+          </ac:spMkLst>
+        </pc:spChg>
+        <pc:spChg chg="del">
+          <ac:chgData name="성욱 진" userId="f47a80d7871cb125" providerId="LiveId" clId="{FDCBA572-350E-4C39-BF59-3626AC33FF79}" dt="2026-03-19T05:51:22.789" v="4" actId="478"/>
+          <ac:spMkLst>
+            <pc:docMk/>
+            <pc:sldMk cId="687017097" sldId="256"/>
+            <ac:spMk id="10" creationId="{5963AA9B-179B-4820-BEDE-45A0E81B1DD5}"/>
+          </ac:spMkLst>
+        </pc:spChg>
+        <pc:spChg chg="del topLvl">
+          <ac:chgData name="성욱 진" userId="f47a80d7871cb125" providerId="LiveId" clId="{FDCBA572-350E-4C39-BF59-3626AC33FF79}" dt="2026-03-19T05:51:26.562" v="5" actId="478"/>
+          <ac:spMkLst>
+            <pc:docMk/>
+            <pc:sldMk cId="687017097" sldId="256"/>
+            <ac:spMk id="12" creationId="{558FE02F-E547-4FCD-AD02-0B8DB31EDA64}"/>
+          </ac:spMkLst>
+        </pc:spChg>
+        <pc:spChg chg="del">
+          <ac:chgData name="성욱 진" userId="f47a80d7871cb125" providerId="LiveId" clId="{FDCBA572-350E-4C39-BF59-3626AC33FF79}" dt="2026-03-19T05:51:17.673" v="3" actId="478"/>
+          <ac:spMkLst>
+            <pc:docMk/>
+            <pc:sldMk cId="687017097" sldId="256"/>
+            <ac:spMk id="13" creationId="{6DCD28C2-F01E-47E4-9A35-385BE5944A69}"/>
+          </ac:spMkLst>
+        </pc:spChg>
+        <pc:spChg chg="topLvl">
+          <ac:chgData name="성욱 진" userId="f47a80d7871cb125" providerId="LiveId" clId="{FDCBA572-350E-4C39-BF59-3626AC33FF79}" dt="2026-03-19T05:51:26.562" v="5" actId="478"/>
+          <ac:spMkLst>
+            <pc:docMk/>
+            <pc:sldMk cId="687017097" sldId="256"/>
+            <ac:spMk id="14" creationId="{05BCAF62-D4BF-460D-8135-96EB901E9318}"/>
+          </ac:spMkLst>
+        </pc:spChg>
+        <pc:grpChg chg="del">
+          <ac:chgData name="성욱 진" userId="f47a80d7871cb125" providerId="LiveId" clId="{FDCBA572-350E-4C39-BF59-3626AC33FF79}" dt="2026-03-19T05:51:26.562" v="5" actId="478"/>
+          <ac:grpSpMkLst>
+            <pc:docMk/>
+            <pc:sldMk cId="687017097" sldId="256"/>
+            <ac:grpSpMk id="15" creationId="{7ED67502-7674-4AEC-9490-BE720DDDB019}"/>
+          </ac:grpSpMkLst>
+        </pc:grpChg>
+      </pc:sldChg>
+      <pc:sldChg chg="del">
+        <pc:chgData name="성욱 진" userId="f47a80d7871cb125" providerId="LiveId" clId="{FDCBA572-350E-4C39-BF59-3626AC33FF79}" dt="2026-03-19T05:51:37.410" v="6" actId="47"/>
+        <pc:sldMkLst>
+          <pc:docMk/>
+          <pc:sldMk cId="368021184" sldId="257"/>
+        </pc:sldMkLst>
+      </pc:sldChg>
+      <pc:sldChg chg="del">
+        <pc:chgData name="성욱 진" userId="f47a80d7871cb125" providerId="LiveId" clId="{FDCBA572-350E-4C39-BF59-3626AC33FF79}" dt="2026-03-19T05:56:01.480" v="7" actId="47"/>
+        <pc:sldMkLst>
+          <pc:docMk/>
+          <pc:sldMk cId="3501440110" sldId="260"/>
+        </pc:sldMkLst>
+      </pc:sldChg>
+      <pc:sldChg chg="del">
+        <pc:chgData name="성욱 진" userId="f47a80d7871cb125" providerId="LiveId" clId="{FDCBA572-350E-4C39-BF59-3626AC33FF79}" dt="2026-03-19T05:56:01.480" v="7" actId="47"/>
+        <pc:sldMkLst>
+          <pc:docMk/>
+          <pc:sldMk cId="2388758371" sldId="261"/>
+        </pc:sldMkLst>
+      </pc:sldChg>
+      <pc:sldChg chg="del mod modShow">
+        <pc:chgData name="성욱 진" userId="f47a80d7871cb125" providerId="LiveId" clId="{FDCBA572-350E-4C39-BF59-3626AC33FF79}" dt="2026-03-19T05:56:01.480" v="7" actId="47"/>
         <pc:sldMkLst>
           <pc:docMk/>
           <pc:sldMk cId="2289482787" sldId="267"/>
@@ -3301,7 +3377,7 @@
         </p:nvSpPr>
         <p:spPr>
           <a:xfrm>
-            <a:off x="4763554" y="4834293"/>
+            <a:off x="4938058" y="4834293"/>
             <a:ext cx="3924300" cy="413931"/>
           </a:xfrm>
           <a:prstGeom prst="rect">
